--- a/PFAssignment.pptx
+++ b/PFAssignment.pptx
@@ -6,6 +6,7 @@
   </p:sldMasterIdLst>
   <p:sldIdLst>
     <p:sldId id="256" r:id="rId2"/>
+    <p:sldId id="257" r:id="rId3"/>
   </p:sldIdLst>
   <p:sldSz cx="12192000" cy="6858000"/>
   <p:notesSz cx="6858000" cy="9144000"/>
@@ -104,1076 +105,20 @@
       </a:defRPr>
     </a:lvl9pPr>
   </p:defaultTextStyle>
+  <p:extLst>
+    <p:ext uri="{EFAFB233-063F-42B5-8137-9DF3F51BA10A}">
+      <p15:sldGuideLst xmlns:p15="http://schemas.microsoft.com/office/powerpoint/2012/main"/>
+    </p:ext>
+  </p:extLst>
 </p:presentation>
 </file>
 
 <file path=ppt/revisionInfo.xml><?xml version="1.0" encoding="utf-8"?>
 <p1510:revInfo xmlns:a="http://schemas.openxmlformats.org/drawingml/2006/main" xmlns:r="http://schemas.openxmlformats.org/officeDocument/2006/relationships" xmlns:p1510="http://schemas.microsoft.com/office/powerpoint/2015/10/main">
   <p1510:revLst>
-    <p1510:client id="{5F8D4163-9908-42B3-8B13-30E866EF2526}" v="38" dt="2025-11-25T14:49:14.325"/>
+    <p1510:client id="{5F8D4163-9908-42B3-8B13-30E866EF2526}" v="44" dt="2025-11-26T15:31:56.873"/>
   </p1510:revLst>
 </p1510:revInfo>
-</file>
-
-<file path=ppt/changesInfos/changesInfo1.xml><?xml version="1.0" encoding="utf-8"?>
-<pc:chgInfo xmlns:a="http://schemas.openxmlformats.org/drawingml/2006/main" xmlns:r="http://schemas.openxmlformats.org/officeDocument/2006/relationships" xmlns:ac="http://schemas.microsoft.com/office/drawing/2013/main/command" xmlns:pc="http://schemas.microsoft.com/office/powerpoint/2013/main/command">
-  <pc:docChgLst>
-    <pc:chgData name="Mitchell Lee" userId="67d944aee6d15f9c" providerId="LiveId" clId="{33447587-8799-4C1C-9907-A87237C93132}"/>
-    <pc:docChg chg="undo custSel modSld">
-      <pc:chgData name="Mitchell Lee" userId="67d944aee6d15f9c" providerId="LiveId" clId="{33447587-8799-4C1C-9907-A87237C93132}" dt="2025-11-25T14:49:36.378" v="1605" actId="1076"/>
-      <pc:docMkLst>
-        <pc:docMk/>
-      </pc:docMkLst>
-      <pc:sldChg chg="addSp delSp modSp mod">
-        <pc:chgData name="Mitchell Lee" userId="67d944aee6d15f9c" providerId="LiveId" clId="{33447587-8799-4C1C-9907-A87237C93132}" dt="2025-11-25T14:49:36.378" v="1605" actId="1076"/>
-        <pc:sldMkLst>
-          <pc:docMk/>
-          <pc:sldMk cId="1129723175" sldId="256"/>
-        </pc:sldMkLst>
-        <pc:spChg chg="mod">
-          <ac:chgData name="Mitchell Lee" userId="67d944aee6d15f9c" providerId="LiveId" clId="{33447587-8799-4C1C-9907-A87237C93132}" dt="2025-11-25T14:31:12.966" v="1380" actId="120"/>
-          <ac:spMkLst>
-            <pc:docMk/>
-            <pc:sldMk cId="1129723175" sldId="256"/>
-            <ac:spMk id="11" creationId="{3ADAE999-C3E2-0A6C-0A4E-7701F135AB8E}"/>
-          </ac:spMkLst>
-        </pc:spChg>
-        <pc:spChg chg="mod">
-          <ac:chgData name="Mitchell Lee" userId="67d944aee6d15f9c" providerId="LiveId" clId="{33447587-8799-4C1C-9907-A87237C93132}" dt="2025-11-25T14:29:37.319" v="1374" actId="207"/>
-          <ac:spMkLst>
-            <pc:docMk/>
-            <pc:sldMk cId="1129723175" sldId="256"/>
-            <ac:spMk id="12" creationId="{E4B49EBB-5EF4-676A-A97B-4D7876E6CC2F}"/>
-          </ac:spMkLst>
-        </pc:spChg>
-        <pc:spChg chg="mod">
-          <ac:chgData name="Mitchell Lee" userId="67d944aee6d15f9c" providerId="LiveId" clId="{33447587-8799-4C1C-9907-A87237C93132}" dt="2025-11-25T14:29:37.319" v="1374" actId="207"/>
-          <ac:spMkLst>
-            <pc:docMk/>
-            <pc:sldMk cId="1129723175" sldId="256"/>
-            <ac:spMk id="17" creationId="{D9AB5F54-2DB0-AF62-30BA-DFEC224767B6}"/>
-          </ac:spMkLst>
-        </pc:spChg>
-        <pc:spChg chg="mod">
-          <ac:chgData name="Mitchell Lee" userId="67d944aee6d15f9c" providerId="LiveId" clId="{33447587-8799-4C1C-9907-A87237C93132}" dt="2025-11-25T14:29:37.319" v="1374" actId="207"/>
-          <ac:spMkLst>
-            <pc:docMk/>
-            <pc:sldMk cId="1129723175" sldId="256"/>
-            <ac:spMk id="18" creationId="{D54D396C-B07F-56E9-4D8C-F840FED22E94}"/>
-          </ac:spMkLst>
-        </pc:spChg>
-        <pc:spChg chg="mod">
-          <ac:chgData name="Mitchell Lee" userId="67d944aee6d15f9c" providerId="LiveId" clId="{33447587-8799-4C1C-9907-A87237C93132}" dt="2025-11-25T14:30:29.942" v="1378" actId="1076"/>
-          <ac:spMkLst>
-            <pc:docMk/>
-            <pc:sldMk cId="1129723175" sldId="256"/>
-            <ac:spMk id="19" creationId="{FBEC63BB-B6B1-4BF4-585C-3FA25F2BFB79}"/>
-          </ac:spMkLst>
-        </pc:spChg>
-        <pc:spChg chg="mod">
-          <ac:chgData name="Mitchell Lee" userId="67d944aee6d15f9c" providerId="LiveId" clId="{33447587-8799-4C1C-9907-A87237C93132}" dt="2025-11-25T14:29:37.319" v="1374" actId="207"/>
-          <ac:spMkLst>
-            <pc:docMk/>
-            <pc:sldMk cId="1129723175" sldId="256"/>
-            <ac:spMk id="20" creationId="{C8279CDA-E483-5585-8B3B-D5740115451B}"/>
-          </ac:spMkLst>
-        </pc:spChg>
-        <pc:spChg chg="mod">
-          <ac:chgData name="Mitchell Lee" userId="67d944aee6d15f9c" providerId="LiveId" clId="{33447587-8799-4C1C-9907-A87237C93132}" dt="2025-11-25T14:30:29.942" v="1378" actId="1076"/>
-          <ac:spMkLst>
-            <pc:docMk/>
-            <pc:sldMk cId="1129723175" sldId="256"/>
-            <ac:spMk id="21" creationId="{85CBC82E-2566-D43F-8B16-ECD3EA48EA59}"/>
-          </ac:spMkLst>
-        </pc:spChg>
-        <pc:spChg chg="mod">
-          <ac:chgData name="Mitchell Lee" userId="67d944aee6d15f9c" providerId="LiveId" clId="{33447587-8799-4C1C-9907-A87237C93132}" dt="2025-11-25T14:29:37.319" v="1374" actId="207"/>
-          <ac:spMkLst>
-            <pc:docMk/>
-            <pc:sldMk cId="1129723175" sldId="256"/>
-            <ac:spMk id="43" creationId="{DC1ACAD7-C2E6-8F58-3AC4-A5EEB88DD653}"/>
-          </ac:spMkLst>
-        </pc:spChg>
-        <pc:spChg chg="add mod">
-          <ac:chgData name="Mitchell Lee" userId="67d944aee6d15f9c" providerId="LiveId" clId="{33447587-8799-4C1C-9907-A87237C93132}" dt="2025-11-25T14:29:37.319" v="1374" actId="207"/>
-          <ac:spMkLst>
-            <pc:docMk/>
-            <pc:sldMk cId="1129723175" sldId="256"/>
-            <ac:spMk id="47" creationId="{14F5D759-7FAC-9023-8638-367BFD0D9616}"/>
-          </ac:spMkLst>
-        </pc:spChg>
-        <pc:spChg chg="add mod">
-          <ac:chgData name="Mitchell Lee" userId="67d944aee6d15f9c" providerId="LiveId" clId="{33447587-8799-4C1C-9907-A87237C93132}" dt="2025-11-25T14:14:08.298" v="1032"/>
-          <ac:spMkLst>
-            <pc:docMk/>
-            <pc:sldMk cId="1129723175" sldId="256"/>
-            <ac:spMk id="52" creationId="{22BCE63E-3CBE-FEDF-DBE2-EC5D2B7FA1A2}"/>
-          </ac:spMkLst>
-        </pc:spChg>
-        <pc:spChg chg="add mod">
-          <ac:chgData name="Mitchell Lee" userId="67d944aee6d15f9c" providerId="LiveId" clId="{33447587-8799-4C1C-9907-A87237C93132}" dt="2025-11-25T14:35:41.825" v="1400" actId="1076"/>
-          <ac:spMkLst>
-            <pc:docMk/>
-            <pc:sldMk cId="1129723175" sldId="256"/>
-            <ac:spMk id="53" creationId="{05D89955-9770-A144-82A1-72D0555701C5}"/>
-          </ac:spMkLst>
-        </pc:spChg>
-        <pc:spChg chg="add del mod">
-          <ac:chgData name="Mitchell Lee" userId="67d944aee6d15f9c" providerId="LiveId" clId="{33447587-8799-4C1C-9907-A87237C93132}" dt="2025-11-25T11:51:08.320" v="136" actId="478"/>
-          <ac:spMkLst>
-            <pc:docMk/>
-            <pc:sldMk cId="1129723175" sldId="256"/>
-            <ac:spMk id="72" creationId="{283BE937-F696-129B-DC9C-A8A2023C1427}"/>
-          </ac:spMkLst>
-        </pc:spChg>
-        <pc:spChg chg="add mod">
-          <ac:chgData name="Mitchell Lee" userId="67d944aee6d15f9c" providerId="LiveId" clId="{33447587-8799-4C1C-9907-A87237C93132}" dt="2025-11-25T14:35:41.825" v="1400" actId="1076"/>
-          <ac:spMkLst>
-            <pc:docMk/>
-            <pc:sldMk cId="1129723175" sldId="256"/>
-            <ac:spMk id="73" creationId="{71AECD8A-B5D0-7C2D-19F9-5A72A92009D7}"/>
-          </ac:spMkLst>
-        </pc:spChg>
-        <pc:spChg chg="add mod">
-          <ac:chgData name="Mitchell Lee" userId="67d944aee6d15f9c" providerId="LiveId" clId="{33447587-8799-4C1C-9907-A87237C93132}" dt="2025-11-25T14:35:41.825" v="1400" actId="1076"/>
-          <ac:spMkLst>
-            <pc:docMk/>
-            <pc:sldMk cId="1129723175" sldId="256"/>
-            <ac:spMk id="74" creationId="{9EC618B9-81E1-B8F2-2424-8A1FA601DD3D}"/>
-          </ac:spMkLst>
-        </pc:spChg>
-        <pc:spChg chg="add mod">
-          <ac:chgData name="Mitchell Lee" userId="67d944aee6d15f9c" providerId="LiveId" clId="{33447587-8799-4C1C-9907-A87237C93132}" dt="2025-11-25T14:30:29.942" v="1378" actId="1076"/>
-          <ac:spMkLst>
-            <pc:docMk/>
-            <pc:sldMk cId="1129723175" sldId="256"/>
-            <ac:spMk id="75" creationId="{DDEB9B48-8A93-9640-0EBC-45D65BB26D27}"/>
-          </ac:spMkLst>
-        </pc:spChg>
-        <pc:spChg chg="add del mod">
-          <ac:chgData name="Mitchell Lee" userId="67d944aee6d15f9c" providerId="LiveId" clId="{33447587-8799-4C1C-9907-A87237C93132}" dt="2025-11-25T11:50:49.347" v="132" actId="478"/>
-          <ac:spMkLst>
-            <pc:docMk/>
-            <pc:sldMk cId="1129723175" sldId="256"/>
-            <ac:spMk id="76" creationId="{556E9341-75E2-6030-7D8D-D4C798CD5AF3}"/>
-          </ac:spMkLst>
-        </pc:spChg>
-        <pc:spChg chg="add mod">
-          <ac:chgData name="Mitchell Lee" userId="67d944aee6d15f9c" providerId="LiveId" clId="{33447587-8799-4C1C-9907-A87237C93132}" dt="2025-11-25T14:14:08.298" v="1032"/>
-          <ac:spMkLst>
-            <pc:docMk/>
-            <pc:sldMk cId="1129723175" sldId="256"/>
-            <ac:spMk id="77" creationId="{7DBDBC06-04A7-4ABD-BB85-74F8306FAE7C}"/>
-          </ac:spMkLst>
-        </pc:spChg>
-        <pc:spChg chg="add del mod">
-          <ac:chgData name="Mitchell Lee" userId="67d944aee6d15f9c" providerId="LiveId" clId="{33447587-8799-4C1C-9907-A87237C93132}" dt="2025-11-25T11:50:59.160" v="133" actId="478"/>
-          <ac:spMkLst>
-            <pc:docMk/>
-            <pc:sldMk cId="1129723175" sldId="256"/>
-            <ac:spMk id="78" creationId="{CEC53035-4F31-3565-A8DB-48E8D9AF7DC7}"/>
-          </ac:spMkLst>
-        </pc:spChg>
-        <pc:spChg chg="add del mod">
-          <ac:chgData name="Mitchell Lee" userId="67d944aee6d15f9c" providerId="LiveId" clId="{33447587-8799-4C1C-9907-A87237C93132}" dt="2025-11-25T11:51:07.220" v="135" actId="478"/>
-          <ac:spMkLst>
-            <pc:docMk/>
-            <pc:sldMk cId="1129723175" sldId="256"/>
-            <ac:spMk id="79" creationId="{37F7B4FE-FF46-92E4-C0D5-59CEDE20CD41}"/>
-          </ac:spMkLst>
-        </pc:spChg>
-        <pc:spChg chg="add del mod">
-          <ac:chgData name="Mitchell Lee" userId="67d944aee6d15f9c" providerId="LiveId" clId="{33447587-8799-4C1C-9907-A87237C93132}" dt="2025-11-25T11:51:09.187" v="137" actId="478"/>
-          <ac:spMkLst>
-            <pc:docMk/>
-            <pc:sldMk cId="1129723175" sldId="256"/>
-            <ac:spMk id="80" creationId="{9F8B3705-D3FD-0C6D-0ECA-797FE382D0E9}"/>
-          </ac:spMkLst>
-        </pc:spChg>
-        <pc:spChg chg="add del mod">
-          <ac:chgData name="Mitchell Lee" userId="67d944aee6d15f9c" providerId="LiveId" clId="{33447587-8799-4C1C-9907-A87237C93132}" dt="2025-11-25T11:51:10.223" v="138" actId="478"/>
-          <ac:spMkLst>
-            <pc:docMk/>
-            <pc:sldMk cId="1129723175" sldId="256"/>
-            <ac:spMk id="81" creationId="{61EFCE14-A1CC-11EB-3406-2FDF28EDF564}"/>
-          </ac:spMkLst>
-        </pc:spChg>
-        <pc:spChg chg="add del mod">
-          <ac:chgData name="Mitchell Lee" userId="67d944aee6d15f9c" providerId="LiveId" clId="{33447587-8799-4C1C-9907-A87237C93132}" dt="2025-11-25T11:51:11.185" v="139" actId="478"/>
-          <ac:spMkLst>
-            <pc:docMk/>
-            <pc:sldMk cId="1129723175" sldId="256"/>
-            <ac:spMk id="82" creationId="{14B28062-0387-224E-3CCE-7BAD8CF348C5}"/>
-          </ac:spMkLst>
-        </pc:spChg>
-        <pc:spChg chg="add del mod">
-          <ac:chgData name="Mitchell Lee" userId="67d944aee6d15f9c" providerId="LiveId" clId="{33447587-8799-4C1C-9907-A87237C93132}" dt="2025-11-25T11:51:12.391" v="140" actId="478"/>
-          <ac:spMkLst>
-            <pc:docMk/>
-            <pc:sldMk cId="1129723175" sldId="256"/>
-            <ac:spMk id="83" creationId="{9535C2E7-7E42-875C-1D62-E44376D3EF5A}"/>
-          </ac:spMkLst>
-        </pc:spChg>
-        <pc:spChg chg="add del mod">
-          <ac:chgData name="Mitchell Lee" userId="67d944aee6d15f9c" providerId="LiveId" clId="{33447587-8799-4C1C-9907-A87237C93132}" dt="2025-11-25T11:51:13.271" v="141" actId="478"/>
-          <ac:spMkLst>
-            <pc:docMk/>
-            <pc:sldMk cId="1129723175" sldId="256"/>
-            <ac:spMk id="84" creationId="{6CE09B70-9647-4081-5B19-79E17E12716D}"/>
-          </ac:spMkLst>
-        </pc:spChg>
-        <pc:spChg chg="add del mod">
-          <ac:chgData name="Mitchell Lee" userId="67d944aee6d15f9c" providerId="LiveId" clId="{33447587-8799-4C1C-9907-A87237C93132}" dt="2025-11-25T11:51:14.278" v="142" actId="478"/>
-          <ac:spMkLst>
-            <pc:docMk/>
-            <pc:sldMk cId="1129723175" sldId="256"/>
-            <ac:spMk id="85" creationId="{4B641949-8AB0-332B-7FA3-30D329F32958}"/>
-          </ac:spMkLst>
-        </pc:spChg>
-        <pc:spChg chg="add mod">
-          <ac:chgData name="Mitchell Lee" userId="67d944aee6d15f9c" providerId="LiveId" clId="{33447587-8799-4C1C-9907-A87237C93132}" dt="2025-11-25T14:35:41.825" v="1400" actId="1076"/>
-          <ac:spMkLst>
-            <pc:docMk/>
-            <pc:sldMk cId="1129723175" sldId="256"/>
-            <ac:spMk id="86" creationId="{364DFDEC-F2D0-2AF4-49D0-1D8367C868FB}"/>
-          </ac:spMkLst>
-        </pc:spChg>
-        <pc:spChg chg="add mod">
-          <ac:chgData name="Mitchell Lee" userId="67d944aee6d15f9c" providerId="LiveId" clId="{33447587-8799-4C1C-9907-A87237C93132}" dt="2025-11-25T14:35:41.825" v="1400" actId="1076"/>
-          <ac:spMkLst>
-            <pc:docMk/>
-            <pc:sldMk cId="1129723175" sldId="256"/>
-            <ac:spMk id="87" creationId="{9573C56F-4862-4036-9B76-A6AEB451B6C7}"/>
-          </ac:spMkLst>
-        </pc:spChg>
-        <pc:spChg chg="add mod">
-          <ac:chgData name="Mitchell Lee" userId="67d944aee6d15f9c" providerId="LiveId" clId="{33447587-8799-4C1C-9907-A87237C93132}" dt="2025-11-25T14:30:29.942" v="1378" actId="1076"/>
-          <ac:spMkLst>
-            <pc:docMk/>
-            <pc:sldMk cId="1129723175" sldId="256"/>
-            <ac:spMk id="88" creationId="{2A334A56-F8BE-8FD8-CB2E-FD18FD91D70F}"/>
-          </ac:spMkLst>
-        </pc:spChg>
-        <pc:spChg chg="add mod">
-          <ac:chgData name="Mitchell Lee" userId="67d944aee6d15f9c" providerId="LiveId" clId="{33447587-8799-4C1C-9907-A87237C93132}" dt="2025-11-25T14:30:29.942" v="1378" actId="1076"/>
-          <ac:spMkLst>
-            <pc:docMk/>
-            <pc:sldMk cId="1129723175" sldId="256"/>
-            <ac:spMk id="89" creationId="{F193FC31-2395-0C0E-5774-73EAB85C5FFD}"/>
-          </ac:spMkLst>
-        </pc:spChg>
-        <pc:spChg chg="add mod">
-          <ac:chgData name="Mitchell Lee" userId="67d944aee6d15f9c" providerId="LiveId" clId="{33447587-8799-4C1C-9907-A87237C93132}" dt="2025-11-25T14:35:41.825" v="1400" actId="1076"/>
-          <ac:spMkLst>
-            <pc:docMk/>
-            <pc:sldMk cId="1129723175" sldId="256"/>
-            <ac:spMk id="90" creationId="{D57AD364-237A-5178-B37D-573C97B57522}"/>
-          </ac:spMkLst>
-        </pc:spChg>
-        <pc:spChg chg="add mod">
-          <ac:chgData name="Mitchell Lee" userId="67d944aee6d15f9c" providerId="LiveId" clId="{33447587-8799-4C1C-9907-A87237C93132}" dt="2025-11-25T14:35:41.825" v="1400" actId="1076"/>
-          <ac:spMkLst>
-            <pc:docMk/>
-            <pc:sldMk cId="1129723175" sldId="256"/>
-            <ac:spMk id="91" creationId="{A051D00F-1687-1114-7A1B-4BD701EC9E3C}"/>
-          </ac:spMkLst>
-        </pc:spChg>
-        <pc:spChg chg="add mod">
-          <ac:chgData name="Mitchell Lee" userId="67d944aee6d15f9c" providerId="LiveId" clId="{33447587-8799-4C1C-9907-A87237C93132}" dt="2025-11-25T14:30:29.942" v="1378" actId="1076"/>
-          <ac:spMkLst>
-            <pc:docMk/>
-            <pc:sldMk cId="1129723175" sldId="256"/>
-            <ac:spMk id="92" creationId="{4257C485-E507-EEDC-27C9-D772080165FE}"/>
-          </ac:spMkLst>
-        </pc:spChg>
-        <pc:spChg chg="add mod">
-          <ac:chgData name="Mitchell Lee" userId="67d944aee6d15f9c" providerId="LiveId" clId="{33447587-8799-4C1C-9907-A87237C93132}" dt="2025-11-25T14:14:08.298" v="1032"/>
-          <ac:spMkLst>
-            <pc:docMk/>
-            <pc:sldMk cId="1129723175" sldId="256"/>
-            <ac:spMk id="93" creationId="{FEAB44D6-22DF-8948-921B-442F2AB8C994}"/>
-          </ac:spMkLst>
-        </pc:spChg>
-        <pc:spChg chg="add mod">
-          <ac:chgData name="Mitchell Lee" userId="67d944aee6d15f9c" providerId="LiveId" clId="{33447587-8799-4C1C-9907-A87237C93132}" dt="2025-11-25T14:35:41.825" v="1400" actId="1076"/>
-          <ac:spMkLst>
-            <pc:docMk/>
-            <pc:sldMk cId="1129723175" sldId="256"/>
-            <ac:spMk id="274" creationId="{1B590230-28D2-4765-FCD4-B0727D8B3B12}"/>
-          </ac:spMkLst>
-        </pc:spChg>
-        <pc:spChg chg="add mod">
-          <ac:chgData name="Mitchell Lee" userId="67d944aee6d15f9c" providerId="LiveId" clId="{33447587-8799-4C1C-9907-A87237C93132}" dt="2025-11-25T14:14:08.298" v="1032"/>
-          <ac:spMkLst>
-            <pc:docMk/>
-            <pc:sldMk cId="1129723175" sldId="256"/>
-            <ac:spMk id="275" creationId="{B66035FD-FD6C-5CBE-3259-14620492035F}"/>
-          </ac:spMkLst>
-        </pc:spChg>
-        <pc:spChg chg="add mod">
-          <ac:chgData name="Mitchell Lee" userId="67d944aee6d15f9c" providerId="LiveId" clId="{33447587-8799-4C1C-9907-A87237C93132}" dt="2025-11-25T14:30:11.554" v="1377" actId="14100"/>
-          <ac:spMkLst>
-            <pc:docMk/>
-            <pc:sldMk cId="1129723175" sldId="256"/>
-            <ac:spMk id="320" creationId="{8CEFE208-5490-BD23-D6E3-AED6C75B0748}"/>
-          </ac:spMkLst>
-        </pc:spChg>
-        <pc:spChg chg="add mod">
-          <ac:chgData name="Mitchell Lee" userId="67d944aee6d15f9c" providerId="LiveId" clId="{33447587-8799-4C1C-9907-A87237C93132}" dt="2025-11-25T14:35:53.536" v="1401" actId="1076"/>
-          <ac:spMkLst>
-            <pc:docMk/>
-            <pc:sldMk cId="1129723175" sldId="256"/>
-            <ac:spMk id="350" creationId="{511C2A87-0E26-2489-6FE4-5B944BC8D9BD}"/>
-          </ac:spMkLst>
-        </pc:spChg>
-        <pc:spChg chg="add mod">
-          <ac:chgData name="Mitchell Lee" userId="67d944aee6d15f9c" providerId="LiveId" clId="{33447587-8799-4C1C-9907-A87237C93132}" dt="2025-11-25T14:35:59.152" v="1402" actId="1076"/>
-          <ac:spMkLst>
-            <pc:docMk/>
-            <pc:sldMk cId="1129723175" sldId="256"/>
-            <ac:spMk id="448" creationId="{9D351C84-375C-7476-4B62-600E9D212F3C}"/>
-          </ac:spMkLst>
-        </pc:spChg>
-        <pc:spChg chg="add mod">
-          <ac:chgData name="Mitchell Lee" userId="67d944aee6d15f9c" providerId="LiveId" clId="{33447587-8799-4C1C-9907-A87237C93132}" dt="2025-11-25T14:30:29.942" v="1378" actId="1076"/>
-          <ac:spMkLst>
-            <pc:docMk/>
-            <pc:sldMk cId="1129723175" sldId="256"/>
-            <ac:spMk id="557" creationId="{7A8F3C9A-7312-A067-D9A7-FD45C5FAC33E}"/>
-          </ac:spMkLst>
-        </pc:spChg>
-        <pc:spChg chg="add mod">
-          <ac:chgData name="Mitchell Lee" userId="67d944aee6d15f9c" providerId="LiveId" clId="{33447587-8799-4C1C-9907-A87237C93132}" dt="2025-11-25T14:31:35.546" v="1384" actId="114"/>
-          <ac:spMkLst>
-            <pc:docMk/>
-            <pc:sldMk cId="1129723175" sldId="256"/>
-            <ac:spMk id="558" creationId="{E5AA17EC-886A-161B-9D22-32939AFF6286}"/>
-          </ac:spMkLst>
-        </pc:spChg>
-        <pc:spChg chg="add mod">
-          <ac:chgData name="Mitchell Lee" userId="67d944aee6d15f9c" providerId="LiveId" clId="{33447587-8799-4C1C-9907-A87237C93132}" dt="2025-11-25T14:40:39.522" v="1445" actId="207"/>
-          <ac:spMkLst>
-            <pc:docMk/>
-            <pc:sldMk cId="1129723175" sldId="256"/>
-            <ac:spMk id="606" creationId="{2548AFF0-06F3-2E31-376C-12515BF22B23}"/>
-          </ac:spMkLst>
-        </pc:spChg>
-        <pc:spChg chg="add mod ord topLvl">
-          <ac:chgData name="Mitchell Lee" userId="67d944aee6d15f9c" providerId="LiveId" clId="{33447587-8799-4C1C-9907-A87237C93132}" dt="2025-11-25T14:49:14.324" v="1603" actId="164"/>
-          <ac:spMkLst>
-            <pc:docMk/>
-            <pc:sldMk cId="1129723175" sldId="256"/>
-            <ac:spMk id="635" creationId="{36407D63-A14B-17F9-AF8B-7FBE69EB13B0}"/>
-          </ac:spMkLst>
-        </pc:spChg>
-        <pc:spChg chg="add mod ord topLvl">
-          <ac:chgData name="Mitchell Lee" userId="67d944aee6d15f9c" providerId="LiveId" clId="{33447587-8799-4C1C-9907-A87237C93132}" dt="2025-11-25T14:49:14.324" v="1603" actId="164"/>
-          <ac:spMkLst>
-            <pc:docMk/>
-            <pc:sldMk cId="1129723175" sldId="256"/>
-            <ac:spMk id="636" creationId="{DD10CB15-34E0-FE2E-5A18-33E532DCE361}"/>
-          </ac:spMkLst>
-        </pc:spChg>
-        <pc:spChg chg="add mod topLvl">
-          <ac:chgData name="Mitchell Lee" userId="67d944aee6d15f9c" providerId="LiveId" clId="{33447587-8799-4C1C-9907-A87237C93132}" dt="2025-11-25T14:49:14.324" v="1603" actId="164"/>
-          <ac:spMkLst>
-            <pc:docMk/>
-            <pc:sldMk cId="1129723175" sldId="256"/>
-            <ac:spMk id="637" creationId="{07EBBFCE-057C-D690-D03D-2FFEC8CBC608}"/>
-          </ac:spMkLst>
-        </pc:spChg>
-        <pc:grpChg chg="del mod">
-          <ac:chgData name="Mitchell Lee" userId="67d944aee6d15f9c" providerId="LiveId" clId="{33447587-8799-4C1C-9907-A87237C93132}" dt="2025-11-25T11:47:34.610" v="96" actId="165"/>
-          <ac:grpSpMkLst>
-            <pc:docMk/>
-            <pc:sldMk cId="1129723175" sldId="256"/>
-            <ac:grpSpMk id="32" creationId="{D775F1CF-D61B-E9C7-40AC-2965B77E6D4A}"/>
-          </ac:grpSpMkLst>
-        </pc:grpChg>
-        <pc:grpChg chg="add del mod">
-          <ac:chgData name="Mitchell Lee" userId="67d944aee6d15f9c" providerId="LiveId" clId="{33447587-8799-4C1C-9907-A87237C93132}" dt="2025-11-25T12:07:41.069" v="405" actId="165"/>
-          <ac:grpSpMkLst>
-            <pc:docMk/>
-            <pc:sldMk cId="1129723175" sldId="256"/>
-            <ac:grpSpMk id="71" creationId="{62568D86-173D-9300-3F6C-2B37B5F26ED2}"/>
-          </ac:grpSpMkLst>
-        </pc:grpChg>
-        <pc:grpChg chg="add del mod">
-          <ac:chgData name="Mitchell Lee" userId="67d944aee6d15f9c" providerId="LiveId" clId="{33447587-8799-4C1C-9907-A87237C93132}" dt="2025-11-25T14:34:44.034" v="1391" actId="165"/>
-          <ac:grpSpMkLst>
-            <pc:docMk/>
-            <pc:sldMk cId="1129723175" sldId="256"/>
-            <ac:grpSpMk id="570" creationId="{E1F80718-43CD-892D-CF69-4BC3904EF3D1}"/>
-          </ac:grpSpMkLst>
-        </pc:grpChg>
-        <pc:grpChg chg="add del mod">
-          <ac:chgData name="Mitchell Lee" userId="67d944aee6d15f9c" providerId="LiveId" clId="{33447587-8799-4C1C-9907-A87237C93132}" dt="2025-11-25T14:47:56.110" v="1549" actId="165"/>
-          <ac:grpSpMkLst>
-            <pc:docMk/>
-            <pc:sldMk cId="1129723175" sldId="256"/>
-            <ac:grpSpMk id="638" creationId="{5FC0D089-7DA8-53B3-6FB9-45C77B3F736E}"/>
-          </ac:grpSpMkLst>
-        </pc:grpChg>
-        <pc:grpChg chg="add mod">
-          <ac:chgData name="Mitchell Lee" userId="67d944aee6d15f9c" providerId="LiveId" clId="{33447587-8799-4C1C-9907-A87237C93132}" dt="2025-11-25T14:49:36.378" v="1605" actId="1076"/>
-          <ac:grpSpMkLst>
-            <pc:docMk/>
-            <pc:sldMk cId="1129723175" sldId="256"/>
-            <ac:grpSpMk id="639" creationId="{96F0888D-1462-A3B8-C2F5-FEEA3CECE162}"/>
-          </ac:grpSpMkLst>
-        </pc:grpChg>
-        <pc:picChg chg="add del">
-          <ac:chgData name="Mitchell Lee" userId="67d944aee6d15f9c" providerId="LiveId" clId="{33447587-8799-4C1C-9907-A87237C93132}" dt="2025-11-25T14:40:54.887" v="1447" actId="22"/>
-          <ac:picMkLst>
-            <pc:docMk/>
-            <pc:sldMk cId="1129723175" sldId="256"/>
-            <ac:picMk id="632" creationId="{8F11D561-15BA-13B6-7559-549AEFA2D3B5}"/>
-          </ac:picMkLst>
-        </pc:picChg>
-        <pc:picChg chg="add del">
-          <ac:chgData name="Mitchell Lee" userId="67d944aee6d15f9c" providerId="LiveId" clId="{33447587-8799-4C1C-9907-A87237C93132}" dt="2025-11-25T14:41:11.655" v="1449" actId="22"/>
-          <ac:picMkLst>
-            <pc:docMk/>
-            <pc:sldMk cId="1129723175" sldId="256"/>
-            <ac:picMk id="634" creationId="{AAF33131-FACE-BB0E-2293-D318B10C21CC}"/>
-          </ac:picMkLst>
-        </pc:picChg>
-        <pc:cxnChg chg="del mod">
-          <ac:chgData name="Mitchell Lee" userId="67d944aee6d15f9c" providerId="LiveId" clId="{33447587-8799-4C1C-9907-A87237C93132}" dt="2025-11-25T13:55:46.899" v="841" actId="478"/>
-          <ac:cxnSpMkLst>
-            <pc:docMk/>
-            <pc:sldMk cId="1129723175" sldId="256"/>
-            <ac:cxnSpMk id="14" creationId="{25148195-7555-5A6C-9EDC-17526D3379E2}"/>
-          </ac:cxnSpMkLst>
-        </pc:cxnChg>
-        <pc:cxnChg chg="del mod topLvl">
-          <ac:chgData name="Mitchell Lee" userId="67d944aee6d15f9c" providerId="LiveId" clId="{33447587-8799-4C1C-9907-A87237C93132}" dt="2025-11-25T12:07:56.052" v="407" actId="478"/>
-          <ac:cxnSpMkLst>
-            <pc:docMk/>
-            <pc:sldMk cId="1129723175" sldId="256"/>
-            <ac:cxnSpMk id="23" creationId="{45F9087B-7705-CE98-8154-6248B18B35B6}"/>
-          </ac:cxnSpMkLst>
-        </pc:cxnChg>
-        <pc:cxnChg chg="del mod topLvl">
-          <ac:chgData name="Mitchell Lee" userId="67d944aee6d15f9c" providerId="LiveId" clId="{33447587-8799-4C1C-9907-A87237C93132}" dt="2025-11-25T13:46:15.580" v="750" actId="478"/>
-          <ac:cxnSpMkLst>
-            <pc:docMk/>
-            <pc:sldMk cId="1129723175" sldId="256"/>
-            <ac:cxnSpMk id="25" creationId="{937F368C-83D7-4890-F396-4F47D94F3C55}"/>
-          </ac:cxnSpMkLst>
-        </pc:cxnChg>
-        <pc:cxnChg chg="del mod topLvl">
-          <ac:chgData name="Mitchell Lee" userId="67d944aee6d15f9c" providerId="LiveId" clId="{33447587-8799-4C1C-9907-A87237C93132}" dt="2025-11-25T13:46:10.545" v="745" actId="478"/>
-          <ac:cxnSpMkLst>
-            <pc:docMk/>
-            <pc:sldMk cId="1129723175" sldId="256"/>
-            <ac:cxnSpMk id="27" creationId="{B1550BCF-B114-E07A-E5D0-FE6D2757879D}"/>
-          </ac:cxnSpMkLst>
-        </pc:cxnChg>
-        <pc:cxnChg chg="del mod topLvl">
-          <ac:chgData name="Mitchell Lee" userId="67d944aee6d15f9c" providerId="LiveId" clId="{33447587-8799-4C1C-9907-A87237C93132}" dt="2025-11-25T13:46:11.346" v="746" actId="478"/>
-          <ac:cxnSpMkLst>
-            <pc:docMk/>
-            <pc:sldMk cId="1129723175" sldId="256"/>
-            <ac:cxnSpMk id="29" creationId="{D488A0E3-999E-DBA2-9D54-80723DFC0962}"/>
-          </ac:cxnSpMkLst>
-        </pc:cxnChg>
-        <pc:cxnChg chg="del mod topLvl">
-          <ac:chgData name="Mitchell Lee" userId="67d944aee6d15f9c" providerId="LiveId" clId="{33447587-8799-4C1C-9907-A87237C93132}" dt="2025-11-25T13:46:13.549" v="748" actId="478"/>
-          <ac:cxnSpMkLst>
-            <pc:docMk/>
-            <pc:sldMk cId="1129723175" sldId="256"/>
-            <ac:cxnSpMk id="31" creationId="{BD0F095D-21DD-FD6C-DD88-2E745C8F6A0C}"/>
-          </ac:cxnSpMkLst>
-        </pc:cxnChg>
-        <pc:cxnChg chg="del mod topLvl">
-          <ac:chgData name="Mitchell Lee" userId="67d944aee6d15f9c" providerId="LiveId" clId="{33447587-8799-4C1C-9907-A87237C93132}" dt="2025-11-25T13:46:12.385" v="747" actId="478"/>
-          <ac:cxnSpMkLst>
-            <pc:docMk/>
-            <pc:sldMk cId="1129723175" sldId="256"/>
-            <ac:cxnSpMk id="45" creationId="{0B1DD16A-BD46-C87A-7C31-B563A37C11F1}"/>
-          </ac:cxnSpMkLst>
-        </pc:cxnChg>
-        <pc:cxnChg chg="add del mod topLvl">
-          <ac:chgData name="Mitchell Lee" userId="67d944aee6d15f9c" providerId="LiveId" clId="{33447587-8799-4C1C-9907-A87237C93132}" dt="2025-11-25T12:12:56.078" v="443" actId="478"/>
-          <ac:cxnSpMkLst>
-            <pc:docMk/>
-            <pc:sldMk cId="1129723175" sldId="256"/>
-            <ac:cxnSpMk id="49" creationId="{60A08098-1DB9-EA5D-FF2E-4CA72746D207}"/>
-          </ac:cxnSpMkLst>
-        </pc:cxnChg>
-        <pc:cxnChg chg="add del mod">
-          <ac:chgData name="Mitchell Lee" userId="67d944aee6d15f9c" providerId="LiveId" clId="{33447587-8799-4C1C-9907-A87237C93132}" dt="2025-11-25T13:46:54.923" v="768" actId="478"/>
-          <ac:cxnSpMkLst>
-            <pc:docMk/>
-            <pc:sldMk cId="1129723175" sldId="256"/>
-            <ac:cxnSpMk id="55" creationId="{E098F89B-8B75-D339-E974-9AB694F5ED2E}"/>
-          </ac:cxnSpMkLst>
-        </pc:cxnChg>
-        <pc:cxnChg chg="add del mod">
-          <ac:chgData name="Mitchell Lee" userId="67d944aee6d15f9c" providerId="LiveId" clId="{33447587-8799-4C1C-9907-A87237C93132}" dt="2025-11-25T13:46:53.705" v="767" actId="478"/>
-          <ac:cxnSpMkLst>
-            <pc:docMk/>
-            <pc:sldMk cId="1129723175" sldId="256"/>
-            <ac:cxnSpMk id="57" creationId="{A1B553EB-0306-E5AB-82E0-A78E875306DE}"/>
-          </ac:cxnSpMkLst>
-        </pc:cxnChg>
-        <pc:cxnChg chg="add del mod">
-          <ac:chgData name="Mitchell Lee" userId="67d944aee6d15f9c" providerId="LiveId" clId="{33447587-8799-4C1C-9907-A87237C93132}" dt="2025-11-25T12:06:35.988" v="399" actId="478"/>
-          <ac:cxnSpMkLst>
-            <pc:docMk/>
-            <pc:sldMk cId="1129723175" sldId="256"/>
-            <ac:cxnSpMk id="95" creationId="{906169E3-14FB-DD0F-66DF-C4B7EA95084F}"/>
-          </ac:cxnSpMkLst>
-        </pc:cxnChg>
-        <pc:cxnChg chg="add del mod">
-          <ac:chgData name="Mitchell Lee" userId="67d944aee6d15f9c" providerId="LiveId" clId="{33447587-8799-4C1C-9907-A87237C93132}" dt="2025-11-25T12:06:32.129" v="398" actId="478"/>
-          <ac:cxnSpMkLst>
-            <pc:docMk/>
-            <pc:sldMk cId="1129723175" sldId="256"/>
-            <ac:cxnSpMk id="97" creationId="{3C84A566-9A8A-198D-8602-9C16EFDD3DED}"/>
-          </ac:cxnSpMkLst>
-        </pc:cxnChg>
-        <pc:cxnChg chg="add del mod">
-          <ac:chgData name="Mitchell Lee" userId="67d944aee6d15f9c" providerId="LiveId" clId="{33447587-8799-4C1C-9907-A87237C93132}" dt="2025-11-25T12:08:15.297" v="409" actId="478"/>
-          <ac:cxnSpMkLst>
-            <pc:docMk/>
-            <pc:sldMk cId="1129723175" sldId="256"/>
-            <ac:cxnSpMk id="99" creationId="{2CDEC362-2583-31B4-F263-B4790ED503FB}"/>
-          </ac:cxnSpMkLst>
-        </pc:cxnChg>
-        <pc:cxnChg chg="add del mod">
-          <ac:chgData name="Mitchell Lee" userId="67d944aee6d15f9c" providerId="LiveId" clId="{33447587-8799-4C1C-9907-A87237C93132}" dt="2025-11-25T12:08:16.317" v="410" actId="478"/>
-          <ac:cxnSpMkLst>
-            <pc:docMk/>
-            <pc:sldMk cId="1129723175" sldId="256"/>
-            <ac:cxnSpMk id="101" creationId="{EE3D5D58-32DF-89F7-032E-283696170121}"/>
-          </ac:cxnSpMkLst>
-        </pc:cxnChg>
-        <pc:cxnChg chg="add del mod">
-          <ac:chgData name="Mitchell Lee" userId="67d944aee6d15f9c" providerId="LiveId" clId="{33447587-8799-4C1C-9907-A87237C93132}" dt="2025-11-25T12:08:18.529" v="412" actId="478"/>
-          <ac:cxnSpMkLst>
-            <pc:docMk/>
-            <pc:sldMk cId="1129723175" sldId="256"/>
-            <ac:cxnSpMk id="110" creationId="{791DD70D-DC8C-5B36-E493-A0E3FBFBCA1F}"/>
-          </ac:cxnSpMkLst>
-        </pc:cxnChg>
-        <pc:cxnChg chg="add del mod">
-          <ac:chgData name="Mitchell Lee" userId="67d944aee6d15f9c" providerId="LiveId" clId="{33447587-8799-4C1C-9907-A87237C93132}" dt="2025-11-25T12:08:17.830" v="411" actId="478"/>
-          <ac:cxnSpMkLst>
-            <pc:docMk/>
-            <pc:sldMk cId="1129723175" sldId="256"/>
-            <ac:cxnSpMk id="112" creationId="{6580804A-BBE2-422C-C4AD-70B9945F0122}"/>
-          </ac:cxnSpMkLst>
-        </pc:cxnChg>
-        <pc:cxnChg chg="add del mod">
-          <ac:chgData name="Mitchell Lee" userId="67d944aee6d15f9c" providerId="LiveId" clId="{33447587-8799-4C1C-9907-A87237C93132}" dt="2025-11-25T12:08:19.640" v="413" actId="478"/>
-          <ac:cxnSpMkLst>
-            <pc:docMk/>
-            <pc:sldMk cId="1129723175" sldId="256"/>
-            <ac:cxnSpMk id="128" creationId="{BE88D98C-DD69-6AC9-B1AC-19E28B7B7E4C}"/>
-          </ac:cxnSpMkLst>
-        </pc:cxnChg>
-        <pc:cxnChg chg="add del mod">
-          <ac:chgData name="Mitchell Lee" userId="67d944aee6d15f9c" providerId="LiveId" clId="{33447587-8799-4C1C-9907-A87237C93132}" dt="2025-11-25T12:08:20.385" v="414" actId="478"/>
-          <ac:cxnSpMkLst>
-            <pc:docMk/>
-            <pc:sldMk cId="1129723175" sldId="256"/>
-            <ac:cxnSpMk id="132" creationId="{67308A03-ABF0-112E-6E09-CC83E29B9925}"/>
-          </ac:cxnSpMkLst>
-        </pc:cxnChg>
-        <pc:cxnChg chg="add del mod">
-          <ac:chgData name="Mitchell Lee" userId="67d944aee6d15f9c" providerId="LiveId" clId="{33447587-8799-4C1C-9907-A87237C93132}" dt="2025-11-25T12:08:21.920" v="415" actId="478"/>
-          <ac:cxnSpMkLst>
-            <pc:docMk/>
-            <pc:sldMk cId="1129723175" sldId="256"/>
-            <ac:cxnSpMk id="135" creationId="{B6B189D7-4E0B-F771-E9AA-F7AB0E3E7E5D}"/>
-          </ac:cxnSpMkLst>
-        </pc:cxnChg>
-        <pc:cxnChg chg="add del mod">
-          <ac:chgData name="Mitchell Lee" userId="67d944aee6d15f9c" providerId="LiveId" clId="{33447587-8799-4C1C-9907-A87237C93132}" dt="2025-11-25T12:03:25.761" v="272" actId="478"/>
-          <ac:cxnSpMkLst>
-            <pc:docMk/>
-            <pc:sldMk cId="1129723175" sldId="256"/>
-            <ac:cxnSpMk id="151" creationId="{37AA139C-F887-DA54-B05D-61C118E33A85}"/>
-          </ac:cxnSpMkLst>
-        </pc:cxnChg>
-        <pc:cxnChg chg="add del mod">
-          <ac:chgData name="Mitchell Lee" userId="67d944aee6d15f9c" providerId="LiveId" clId="{33447587-8799-4C1C-9907-A87237C93132}" dt="2025-11-25T12:08:22.527" v="416" actId="478"/>
-          <ac:cxnSpMkLst>
-            <pc:docMk/>
-            <pc:sldMk cId="1129723175" sldId="256"/>
-            <ac:cxnSpMk id="153" creationId="{B3228AB6-F987-9065-2012-2801AB4875B2}"/>
-          </ac:cxnSpMkLst>
-        </pc:cxnChg>
-        <pc:cxnChg chg="add del mod">
-          <ac:chgData name="Mitchell Lee" userId="67d944aee6d15f9c" providerId="LiveId" clId="{33447587-8799-4C1C-9907-A87237C93132}" dt="2025-11-25T13:46:08.573" v="743" actId="478"/>
-          <ac:cxnSpMkLst>
-            <pc:docMk/>
-            <pc:sldMk cId="1129723175" sldId="256"/>
-            <ac:cxnSpMk id="161" creationId="{BE8A3F60-882B-E9D2-6CAA-8A2AEFC41F67}"/>
-          </ac:cxnSpMkLst>
-        </pc:cxnChg>
-        <pc:cxnChg chg="add del mod">
-          <ac:chgData name="Mitchell Lee" userId="67d944aee6d15f9c" providerId="LiveId" clId="{33447587-8799-4C1C-9907-A87237C93132}" dt="2025-11-25T13:46:18.088" v="751" actId="478"/>
-          <ac:cxnSpMkLst>
-            <pc:docMk/>
-            <pc:sldMk cId="1129723175" sldId="256"/>
-            <ac:cxnSpMk id="163" creationId="{60EC7675-1C83-389F-A19D-7839DAED1642}"/>
-          </ac:cxnSpMkLst>
-        </pc:cxnChg>
-        <pc:cxnChg chg="add del mod">
-          <ac:chgData name="Mitchell Lee" userId="67d944aee6d15f9c" providerId="LiveId" clId="{33447587-8799-4C1C-9907-A87237C93132}" dt="2025-11-25T13:46:14.674" v="749" actId="478"/>
-          <ac:cxnSpMkLst>
-            <pc:docMk/>
-            <pc:sldMk cId="1129723175" sldId="256"/>
-            <ac:cxnSpMk id="166" creationId="{2E85ADDD-604F-28FD-71AE-96669C8134CE}"/>
-          </ac:cxnSpMkLst>
-        </pc:cxnChg>
-        <pc:cxnChg chg="add del mod">
-          <ac:chgData name="Mitchell Lee" userId="67d944aee6d15f9c" providerId="LiveId" clId="{33447587-8799-4C1C-9907-A87237C93132}" dt="2025-11-25T13:46:21.238" v="752" actId="478"/>
-          <ac:cxnSpMkLst>
-            <pc:docMk/>
-            <pc:sldMk cId="1129723175" sldId="256"/>
-            <ac:cxnSpMk id="168" creationId="{78DAE9C4-D0F1-33F2-F47B-B8A19C6DDEFD}"/>
-          </ac:cxnSpMkLst>
-        </pc:cxnChg>
-        <pc:cxnChg chg="add del mod">
-          <ac:chgData name="Mitchell Lee" userId="67d944aee6d15f9c" providerId="LiveId" clId="{33447587-8799-4C1C-9907-A87237C93132}" dt="2025-11-25T13:46:22.278" v="753" actId="478"/>
-          <ac:cxnSpMkLst>
-            <pc:docMk/>
-            <pc:sldMk cId="1129723175" sldId="256"/>
-            <ac:cxnSpMk id="170" creationId="{1E11F305-736F-835D-39AA-728A6B29C54E}"/>
-          </ac:cxnSpMkLst>
-        </pc:cxnChg>
-        <pc:cxnChg chg="add del mod">
-          <ac:chgData name="Mitchell Lee" userId="67d944aee6d15f9c" providerId="LiveId" clId="{33447587-8799-4C1C-9907-A87237C93132}" dt="2025-11-25T13:46:23.358" v="754" actId="478"/>
-          <ac:cxnSpMkLst>
-            <pc:docMk/>
-            <pc:sldMk cId="1129723175" sldId="256"/>
-            <ac:cxnSpMk id="173" creationId="{30F21F1E-D57A-D554-CC5C-867AC0674B28}"/>
-          </ac:cxnSpMkLst>
-        </pc:cxnChg>
-        <pc:cxnChg chg="add del mod">
-          <ac:chgData name="Mitchell Lee" userId="67d944aee6d15f9c" providerId="LiveId" clId="{33447587-8799-4C1C-9907-A87237C93132}" dt="2025-11-25T13:46:26.546" v="755" actId="478"/>
-          <ac:cxnSpMkLst>
-            <pc:docMk/>
-            <pc:sldMk cId="1129723175" sldId="256"/>
-            <ac:cxnSpMk id="175" creationId="{C3B85CF7-BDA3-C973-9196-0A98DA593B98}"/>
-          </ac:cxnSpMkLst>
-        </pc:cxnChg>
-        <pc:cxnChg chg="add del mod">
-          <ac:chgData name="Mitchell Lee" userId="67d944aee6d15f9c" providerId="LiveId" clId="{33447587-8799-4C1C-9907-A87237C93132}" dt="2025-11-25T13:46:27.611" v="756" actId="478"/>
-          <ac:cxnSpMkLst>
-            <pc:docMk/>
-            <pc:sldMk cId="1129723175" sldId="256"/>
-            <ac:cxnSpMk id="191" creationId="{F3345F7D-5344-58EF-92B3-D806770DC4FD}"/>
-          </ac:cxnSpMkLst>
-        </pc:cxnChg>
-        <pc:cxnChg chg="add del mod">
-          <ac:chgData name="Mitchell Lee" userId="67d944aee6d15f9c" providerId="LiveId" clId="{33447587-8799-4C1C-9907-A87237C93132}" dt="2025-11-25T13:46:28.637" v="757" actId="478"/>
-          <ac:cxnSpMkLst>
-            <pc:docMk/>
-            <pc:sldMk cId="1129723175" sldId="256"/>
-            <ac:cxnSpMk id="193" creationId="{D2006A9D-A69E-C1AC-B875-5B9898FBFBFA}"/>
-          </ac:cxnSpMkLst>
-        </pc:cxnChg>
-        <pc:cxnChg chg="add del mod">
-          <ac:chgData name="Mitchell Lee" userId="67d944aee6d15f9c" providerId="LiveId" clId="{33447587-8799-4C1C-9907-A87237C93132}" dt="2025-11-25T13:46:29.677" v="758" actId="478"/>
-          <ac:cxnSpMkLst>
-            <pc:docMk/>
-            <pc:sldMk cId="1129723175" sldId="256"/>
-            <ac:cxnSpMk id="206" creationId="{004223B2-E4F9-AA95-36C9-2A42B51BA6E7}"/>
-          </ac:cxnSpMkLst>
-        </pc:cxnChg>
-        <pc:cxnChg chg="add del mod">
-          <ac:chgData name="Mitchell Lee" userId="67d944aee6d15f9c" providerId="LiveId" clId="{33447587-8799-4C1C-9907-A87237C93132}" dt="2025-11-25T13:46:30.513" v="759" actId="478"/>
-          <ac:cxnSpMkLst>
-            <pc:docMk/>
-            <pc:sldMk cId="1129723175" sldId="256"/>
-            <ac:cxnSpMk id="208" creationId="{D54CF6A4-E22D-24AE-343B-0485F2D3B807}"/>
-          </ac:cxnSpMkLst>
-        </pc:cxnChg>
-        <pc:cxnChg chg="add del mod">
-          <ac:chgData name="Mitchell Lee" userId="67d944aee6d15f9c" providerId="LiveId" clId="{33447587-8799-4C1C-9907-A87237C93132}" dt="2025-11-25T13:46:31.238" v="760" actId="478"/>
-          <ac:cxnSpMkLst>
-            <pc:docMk/>
-            <pc:sldMk cId="1129723175" sldId="256"/>
-            <ac:cxnSpMk id="265" creationId="{A2342A0B-946B-DC7C-D666-D7B1B4E3EDA2}"/>
-          </ac:cxnSpMkLst>
-        </pc:cxnChg>
-        <pc:cxnChg chg="add del mod">
-          <ac:chgData name="Mitchell Lee" userId="67d944aee6d15f9c" providerId="LiveId" clId="{33447587-8799-4C1C-9907-A87237C93132}" dt="2025-11-25T13:46:31.861" v="761" actId="478"/>
-          <ac:cxnSpMkLst>
-            <pc:docMk/>
-            <pc:sldMk cId="1129723175" sldId="256"/>
-            <ac:cxnSpMk id="270" creationId="{904E302A-86CA-9164-F555-0C90DE3E8973}"/>
-          </ac:cxnSpMkLst>
-        </pc:cxnChg>
-        <pc:cxnChg chg="add del mod">
-          <ac:chgData name="Mitchell Lee" userId="67d944aee6d15f9c" providerId="LiveId" clId="{33447587-8799-4C1C-9907-A87237C93132}" dt="2025-11-25T13:46:09.677" v="744" actId="478"/>
-          <ac:cxnSpMkLst>
-            <pc:docMk/>
-            <pc:sldMk cId="1129723175" sldId="256"/>
-            <ac:cxnSpMk id="272" creationId="{40067ACD-ADFC-7CC7-F119-2B5CBC373824}"/>
-          </ac:cxnSpMkLst>
-        </pc:cxnChg>
-        <pc:cxnChg chg="add del mod">
-          <ac:chgData name="Mitchell Lee" userId="67d944aee6d15f9c" providerId="LiveId" clId="{33447587-8799-4C1C-9907-A87237C93132}" dt="2025-11-25T13:46:32.499" v="762" actId="478"/>
-          <ac:cxnSpMkLst>
-            <pc:docMk/>
-            <pc:sldMk cId="1129723175" sldId="256"/>
-            <ac:cxnSpMk id="277" creationId="{4F1037EC-4254-0345-6E11-737EDE8E7A8B}"/>
-          </ac:cxnSpMkLst>
-        </pc:cxnChg>
-        <pc:cxnChg chg="add del mod">
-          <ac:chgData name="Mitchell Lee" userId="67d944aee6d15f9c" providerId="LiveId" clId="{33447587-8799-4C1C-9907-A87237C93132}" dt="2025-11-25T13:46:33.082" v="763" actId="478"/>
-          <ac:cxnSpMkLst>
-            <pc:docMk/>
-            <pc:sldMk cId="1129723175" sldId="256"/>
-            <ac:cxnSpMk id="279" creationId="{6C123B5B-4CE1-4DB8-B834-294C7AACBE50}"/>
-          </ac:cxnSpMkLst>
-        </pc:cxnChg>
-        <pc:cxnChg chg="add del mod">
-          <ac:chgData name="Mitchell Lee" userId="67d944aee6d15f9c" providerId="LiveId" clId="{33447587-8799-4C1C-9907-A87237C93132}" dt="2025-11-25T13:05:20.172" v="708" actId="478"/>
-          <ac:cxnSpMkLst>
-            <pc:docMk/>
-            <pc:sldMk cId="1129723175" sldId="256"/>
-            <ac:cxnSpMk id="340" creationId="{A2FAC73B-B598-E21D-168D-1091E76D871A}"/>
-          </ac:cxnSpMkLst>
-        </pc:cxnChg>
-        <pc:cxnChg chg="add mod">
-          <ac:chgData name="Mitchell Lee" userId="67d944aee6d15f9c" providerId="LiveId" clId="{33447587-8799-4C1C-9907-A87237C93132}" dt="2025-11-25T14:30:11.554" v="1377" actId="14100"/>
-          <ac:cxnSpMkLst>
-            <pc:docMk/>
-            <pc:sldMk cId="1129723175" sldId="256"/>
-            <ac:cxnSpMk id="342" creationId="{830CEBCC-9949-E0A5-0FC9-C5F050C0AC2F}"/>
-          </ac:cxnSpMkLst>
-        </pc:cxnChg>
-        <pc:cxnChg chg="add del mod">
-          <ac:chgData name="Mitchell Lee" userId="67d944aee6d15f9c" providerId="LiveId" clId="{33447587-8799-4C1C-9907-A87237C93132}" dt="2025-11-25T13:55:45.540" v="840" actId="478"/>
-          <ac:cxnSpMkLst>
-            <pc:docMk/>
-            <pc:sldMk cId="1129723175" sldId="256"/>
-            <ac:cxnSpMk id="367" creationId="{C10ED6D1-41A2-FE80-A4A7-4D991E97E19F}"/>
-          </ac:cxnSpMkLst>
-        </pc:cxnChg>
-        <pc:cxnChg chg="add mod">
-          <ac:chgData name="Mitchell Lee" userId="67d944aee6d15f9c" providerId="LiveId" clId="{33447587-8799-4C1C-9907-A87237C93132}" dt="2025-11-25T14:03:21.178" v="884" actId="1076"/>
-          <ac:cxnSpMkLst>
-            <pc:docMk/>
-            <pc:sldMk cId="1129723175" sldId="256"/>
-            <ac:cxnSpMk id="369" creationId="{B40824AF-EF9B-DA9D-9F4A-4BADD7691D85}"/>
-          </ac:cxnSpMkLst>
-        </pc:cxnChg>
-        <pc:cxnChg chg="add del mod">
-          <ac:chgData name="Mitchell Lee" userId="67d944aee6d15f9c" providerId="LiveId" clId="{33447587-8799-4C1C-9907-A87237C93132}" dt="2025-11-25T13:55:41.354" v="839" actId="478"/>
-          <ac:cxnSpMkLst>
-            <pc:docMk/>
-            <pc:sldMk cId="1129723175" sldId="256"/>
-            <ac:cxnSpMk id="371" creationId="{65ADDC72-3020-5966-2724-634574BC54BD}"/>
-          </ac:cxnSpMkLst>
-        </pc:cxnChg>
-        <pc:cxnChg chg="add mod">
-          <ac:chgData name="Mitchell Lee" userId="67d944aee6d15f9c" providerId="LiveId" clId="{33447587-8799-4C1C-9907-A87237C93132}" dt="2025-11-25T14:03:21.178" v="884" actId="1076"/>
-          <ac:cxnSpMkLst>
-            <pc:docMk/>
-            <pc:sldMk cId="1129723175" sldId="256"/>
-            <ac:cxnSpMk id="373" creationId="{F687C117-40C1-9429-C405-E1063FC0C80D}"/>
-          </ac:cxnSpMkLst>
-        </pc:cxnChg>
-        <pc:cxnChg chg="add del">
-          <ac:chgData name="Mitchell Lee" userId="67d944aee6d15f9c" providerId="LiveId" clId="{33447587-8799-4C1C-9907-A87237C93132}" dt="2025-11-25T13:53:57.353" v="826" actId="478"/>
-          <ac:cxnSpMkLst>
-            <pc:docMk/>
-            <pc:sldMk cId="1129723175" sldId="256"/>
-            <ac:cxnSpMk id="375" creationId="{3DA7B381-E6E0-E0FC-29AC-0C35A09FFFCA}"/>
-          </ac:cxnSpMkLst>
-        </pc:cxnChg>
-        <pc:cxnChg chg="add mod">
-          <ac:chgData name="Mitchell Lee" userId="67d944aee6d15f9c" providerId="LiveId" clId="{33447587-8799-4C1C-9907-A87237C93132}" dt="2025-11-25T14:03:21.178" v="884" actId="1076"/>
-          <ac:cxnSpMkLst>
-            <pc:docMk/>
-            <pc:sldMk cId="1129723175" sldId="256"/>
-            <ac:cxnSpMk id="377" creationId="{38C9E2D3-6EA7-4922-CC14-78DF00DA6225}"/>
-          </ac:cxnSpMkLst>
-        </pc:cxnChg>
-        <pc:cxnChg chg="add mod">
-          <ac:chgData name="Mitchell Lee" userId="67d944aee6d15f9c" providerId="LiveId" clId="{33447587-8799-4C1C-9907-A87237C93132}" dt="2025-11-25T14:03:21.178" v="884" actId="1076"/>
-          <ac:cxnSpMkLst>
-            <pc:docMk/>
-            <pc:sldMk cId="1129723175" sldId="256"/>
-            <ac:cxnSpMk id="379" creationId="{A816C2D7-3A5E-43B4-AF92-F2F935365CDE}"/>
-          </ac:cxnSpMkLst>
-        </pc:cxnChg>
-        <pc:cxnChg chg="add mod">
-          <ac:chgData name="Mitchell Lee" userId="67d944aee6d15f9c" providerId="LiveId" clId="{33447587-8799-4C1C-9907-A87237C93132}" dt="2025-11-25T14:28:37.055" v="1371" actId="14100"/>
-          <ac:cxnSpMkLst>
-            <pc:docMk/>
-            <pc:sldMk cId="1129723175" sldId="256"/>
-            <ac:cxnSpMk id="381" creationId="{0B054573-DFA6-35C2-8009-08FC501542A3}"/>
-          </ac:cxnSpMkLst>
-        </pc:cxnChg>
-        <pc:cxnChg chg="add mod">
-          <ac:chgData name="Mitchell Lee" userId="67d944aee6d15f9c" providerId="LiveId" clId="{33447587-8799-4C1C-9907-A87237C93132}" dt="2025-11-25T14:28:37.055" v="1371" actId="14100"/>
-          <ac:cxnSpMkLst>
-            <pc:docMk/>
-            <pc:sldMk cId="1129723175" sldId="256"/>
-            <ac:cxnSpMk id="392" creationId="{9B2E4092-018E-0F92-EF3C-743542AA3B96}"/>
-          </ac:cxnSpMkLst>
-        </pc:cxnChg>
-        <pc:cxnChg chg="add mod">
-          <ac:chgData name="Mitchell Lee" userId="67d944aee6d15f9c" providerId="LiveId" clId="{33447587-8799-4C1C-9907-A87237C93132}" dt="2025-11-25T13:58:55.891" v="852" actId="14100"/>
-          <ac:cxnSpMkLst>
-            <pc:docMk/>
-            <pc:sldMk cId="1129723175" sldId="256"/>
-            <ac:cxnSpMk id="394" creationId="{7DCE574F-6CFF-1D47-7985-CC798ED924F4}"/>
-          </ac:cxnSpMkLst>
-        </pc:cxnChg>
-        <pc:cxnChg chg="add mod">
-          <ac:chgData name="Mitchell Lee" userId="67d944aee6d15f9c" providerId="LiveId" clId="{33447587-8799-4C1C-9907-A87237C93132}" dt="2025-11-25T14:03:21.178" v="884" actId="1076"/>
-          <ac:cxnSpMkLst>
-            <pc:docMk/>
-            <pc:sldMk cId="1129723175" sldId="256"/>
-            <ac:cxnSpMk id="397" creationId="{B5F5ACE2-5884-D102-2EDD-D8F4BF9527FD}"/>
-          </ac:cxnSpMkLst>
-        </pc:cxnChg>
-        <pc:cxnChg chg="add mod">
-          <ac:chgData name="Mitchell Lee" userId="67d944aee6d15f9c" providerId="LiveId" clId="{33447587-8799-4C1C-9907-A87237C93132}" dt="2025-11-25T14:35:53.536" v="1401" actId="1076"/>
-          <ac:cxnSpMkLst>
-            <pc:docMk/>
-            <pc:sldMk cId="1129723175" sldId="256"/>
-            <ac:cxnSpMk id="420" creationId="{DB36CEC3-FBF2-7406-7473-90D3CF465F90}"/>
-          </ac:cxnSpMkLst>
-        </pc:cxnChg>
-        <pc:cxnChg chg="add mod">
-          <ac:chgData name="Mitchell Lee" userId="67d944aee6d15f9c" providerId="LiveId" clId="{33447587-8799-4C1C-9907-A87237C93132}" dt="2025-11-25T14:35:53.536" v="1401" actId="1076"/>
-          <ac:cxnSpMkLst>
-            <pc:docMk/>
-            <pc:sldMk cId="1129723175" sldId="256"/>
-            <ac:cxnSpMk id="433" creationId="{E1FD78B4-2A25-A4B4-685E-0D71D7DD8DD8}"/>
-          </ac:cxnSpMkLst>
-        </pc:cxnChg>
-        <pc:cxnChg chg="add mod">
-          <ac:chgData name="Mitchell Lee" userId="67d944aee6d15f9c" providerId="LiveId" clId="{33447587-8799-4C1C-9907-A87237C93132}" dt="2025-11-25T14:35:53.536" v="1401" actId="1076"/>
-          <ac:cxnSpMkLst>
-            <pc:docMk/>
-            <pc:sldMk cId="1129723175" sldId="256"/>
-            <ac:cxnSpMk id="435" creationId="{8E7D0DEA-BC1E-3F5A-7CCE-4A7FDA942954}"/>
-          </ac:cxnSpMkLst>
-        </pc:cxnChg>
-        <pc:cxnChg chg="add mod">
-          <ac:chgData name="Mitchell Lee" userId="67d944aee6d15f9c" providerId="LiveId" clId="{33447587-8799-4C1C-9907-A87237C93132}" dt="2025-11-25T14:35:53.536" v="1401" actId="1076"/>
-          <ac:cxnSpMkLst>
-            <pc:docMk/>
-            <pc:sldMk cId="1129723175" sldId="256"/>
-            <ac:cxnSpMk id="437" creationId="{A457F561-55E6-0BCC-37FE-782F92CD6F5D}"/>
-          </ac:cxnSpMkLst>
-        </pc:cxnChg>
-        <pc:cxnChg chg="add mod">
-          <ac:chgData name="Mitchell Lee" userId="67d944aee6d15f9c" providerId="LiveId" clId="{33447587-8799-4C1C-9907-A87237C93132}" dt="2025-11-25T14:35:53.536" v="1401" actId="1076"/>
-          <ac:cxnSpMkLst>
-            <pc:docMk/>
-            <pc:sldMk cId="1129723175" sldId="256"/>
-            <ac:cxnSpMk id="439" creationId="{DD05D5D6-195D-BD22-5F6D-64C56F2BA783}"/>
-          </ac:cxnSpMkLst>
-        </pc:cxnChg>
-        <pc:cxnChg chg="add mod">
-          <ac:chgData name="Mitchell Lee" userId="67d944aee6d15f9c" providerId="LiveId" clId="{33447587-8799-4C1C-9907-A87237C93132}" dt="2025-11-25T14:35:53.536" v="1401" actId="1076"/>
-          <ac:cxnSpMkLst>
-            <pc:docMk/>
-            <pc:sldMk cId="1129723175" sldId="256"/>
-            <ac:cxnSpMk id="441" creationId="{ABBC1BD1-57F8-692D-98BB-F164978B5F20}"/>
-          </ac:cxnSpMkLst>
-        </pc:cxnChg>
-        <pc:cxnChg chg="add mod">
-          <ac:chgData name="Mitchell Lee" userId="67d944aee6d15f9c" providerId="LiveId" clId="{33447587-8799-4C1C-9907-A87237C93132}" dt="2025-11-25T14:35:53.536" v="1401" actId="1076"/>
-          <ac:cxnSpMkLst>
-            <pc:docMk/>
-            <pc:sldMk cId="1129723175" sldId="256"/>
-            <ac:cxnSpMk id="443" creationId="{207909E9-274C-659A-774F-E38E5D0C920A}"/>
-          </ac:cxnSpMkLst>
-        </pc:cxnChg>
-        <pc:cxnChg chg="add mod">
-          <ac:chgData name="Mitchell Lee" userId="67d944aee6d15f9c" providerId="LiveId" clId="{33447587-8799-4C1C-9907-A87237C93132}" dt="2025-11-25T14:35:53.536" v="1401" actId="1076"/>
-          <ac:cxnSpMkLst>
-            <pc:docMk/>
-            <pc:sldMk cId="1129723175" sldId="256"/>
-            <ac:cxnSpMk id="445" creationId="{6631B811-A84C-ABF0-96B4-F44DD26E1CF2}"/>
-          </ac:cxnSpMkLst>
-        </pc:cxnChg>
-        <pc:cxnChg chg="add mod">
-          <ac:chgData name="Mitchell Lee" userId="67d944aee6d15f9c" providerId="LiveId" clId="{33447587-8799-4C1C-9907-A87237C93132}" dt="2025-11-25T14:35:53.536" v="1401" actId="1076"/>
-          <ac:cxnSpMkLst>
-            <pc:docMk/>
-            <pc:sldMk cId="1129723175" sldId="256"/>
-            <ac:cxnSpMk id="447" creationId="{E8D39D95-4AD0-62B2-AE1B-FA4DD5D59538}"/>
-          </ac:cxnSpMkLst>
-        </pc:cxnChg>
-        <pc:cxnChg chg="add del mod">
-          <ac:chgData name="Mitchell Lee" userId="67d944aee6d15f9c" providerId="LiveId" clId="{33447587-8799-4C1C-9907-A87237C93132}" dt="2025-11-25T14:05:31.270" v="898" actId="478"/>
-          <ac:cxnSpMkLst>
-            <pc:docMk/>
-            <pc:sldMk cId="1129723175" sldId="256"/>
-            <ac:cxnSpMk id="450" creationId="{500E26B1-7F9A-9C07-3CF9-2772AB21EA44}"/>
-          </ac:cxnSpMkLst>
-        </pc:cxnChg>
-        <pc:cxnChg chg="add mod">
-          <ac:chgData name="Mitchell Lee" userId="67d944aee6d15f9c" providerId="LiveId" clId="{33447587-8799-4C1C-9907-A87237C93132}" dt="2025-11-25T14:35:59.152" v="1402" actId="1076"/>
-          <ac:cxnSpMkLst>
-            <pc:docMk/>
-            <pc:sldMk cId="1129723175" sldId="256"/>
-            <ac:cxnSpMk id="452" creationId="{9FF04417-CD01-D953-7751-94875D3899CC}"/>
-          </ac:cxnSpMkLst>
-        </pc:cxnChg>
-        <pc:cxnChg chg="add mod topLvl">
-          <ac:chgData name="Mitchell Lee" userId="67d944aee6d15f9c" providerId="LiveId" clId="{33447587-8799-4C1C-9907-A87237C93132}" dt="2025-11-25T14:35:59.152" v="1402" actId="1076"/>
-          <ac:cxnSpMkLst>
-            <pc:docMk/>
-            <pc:sldMk cId="1129723175" sldId="256"/>
-            <ac:cxnSpMk id="479" creationId="{F105FCB2-2212-36E0-F767-F4EB2ACD6F2E}"/>
-          </ac:cxnSpMkLst>
-        </pc:cxnChg>
-        <pc:cxnChg chg="add mod topLvl">
-          <ac:chgData name="Mitchell Lee" userId="67d944aee6d15f9c" providerId="LiveId" clId="{33447587-8799-4C1C-9907-A87237C93132}" dt="2025-11-25T14:35:59.152" v="1402" actId="1076"/>
-          <ac:cxnSpMkLst>
-            <pc:docMk/>
-            <pc:sldMk cId="1129723175" sldId="256"/>
-            <ac:cxnSpMk id="482" creationId="{6F5CD3FF-AEA2-484A-F851-324391379C22}"/>
-          </ac:cxnSpMkLst>
-        </pc:cxnChg>
-        <pc:cxnChg chg="add mod topLvl">
-          <ac:chgData name="Mitchell Lee" userId="67d944aee6d15f9c" providerId="LiveId" clId="{33447587-8799-4C1C-9907-A87237C93132}" dt="2025-11-25T14:35:59.152" v="1402" actId="1076"/>
-          <ac:cxnSpMkLst>
-            <pc:docMk/>
-            <pc:sldMk cId="1129723175" sldId="256"/>
-            <ac:cxnSpMk id="485" creationId="{1C98F72F-F0C7-4D34-47BE-8E1914C938B9}"/>
-          </ac:cxnSpMkLst>
-        </pc:cxnChg>
-        <pc:cxnChg chg="add mod topLvl">
-          <ac:chgData name="Mitchell Lee" userId="67d944aee6d15f9c" providerId="LiveId" clId="{33447587-8799-4C1C-9907-A87237C93132}" dt="2025-11-25T14:35:59.152" v="1402" actId="1076"/>
-          <ac:cxnSpMkLst>
-            <pc:docMk/>
-            <pc:sldMk cId="1129723175" sldId="256"/>
-            <ac:cxnSpMk id="488" creationId="{9D165FBC-07EF-F387-6416-F21131B4778A}"/>
-          </ac:cxnSpMkLst>
-        </pc:cxnChg>
-        <pc:cxnChg chg="add mod topLvl">
-          <ac:chgData name="Mitchell Lee" userId="67d944aee6d15f9c" providerId="LiveId" clId="{33447587-8799-4C1C-9907-A87237C93132}" dt="2025-11-25T14:35:59.152" v="1402" actId="1076"/>
-          <ac:cxnSpMkLst>
-            <pc:docMk/>
-            <pc:sldMk cId="1129723175" sldId="256"/>
-            <ac:cxnSpMk id="492" creationId="{86B9037E-0B12-764F-1A96-C47ACCE39F44}"/>
-          </ac:cxnSpMkLst>
-        </pc:cxnChg>
-        <pc:cxnChg chg="add mod topLvl">
-          <ac:chgData name="Mitchell Lee" userId="67d944aee6d15f9c" providerId="LiveId" clId="{33447587-8799-4C1C-9907-A87237C93132}" dt="2025-11-25T14:35:59.152" v="1402" actId="1076"/>
-          <ac:cxnSpMkLst>
-            <pc:docMk/>
-            <pc:sldMk cId="1129723175" sldId="256"/>
-            <ac:cxnSpMk id="496" creationId="{18DC45C1-A5D6-4E5A-A3A5-D825DC71B521}"/>
-          </ac:cxnSpMkLst>
-        </pc:cxnChg>
-        <pc:cxnChg chg="add mod topLvl">
-          <ac:chgData name="Mitchell Lee" userId="67d944aee6d15f9c" providerId="LiveId" clId="{33447587-8799-4C1C-9907-A87237C93132}" dt="2025-11-25T14:35:59.152" v="1402" actId="1076"/>
-          <ac:cxnSpMkLst>
-            <pc:docMk/>
-            <pc:sldMk cId="1129723175" sldId="256"/>
-            <ac:cxnSpMk id="499" creationId="{F6E53A0D-9487-F727-962B-0C070148E044}"/>
-          </ac:cxnSpMkLst>
-        </pc:cxnChg>
-        <pc:cxnChg chg="add mod topLvl">
-          <ac:chgData name="Mitchell Lee" userId="67d944aee6d15f9c" providerId="LiveId" clId="{33447587-8799-4C1C-9907-A87237C93132}" dt="2025-11-25T14:35:59.152" v="1402" actId="1076"/>
-          <ac:cxnSpMkLst>
-            <pc:docMk/>
-            <pc:sldMk cId="1129723175" sldId="256"/>
-            <ac:cxnSpMk id="502" creationId="{D82CE79F-A929-D07E-3BEE-4C97A71AB2DA}"/>
-          </ac:cxnSpMkLst>
-        </pc:cxnChg>
-        <pc:cxnChg chg="add mod">
-          <ac:chgData name="Mitchell Lee" userId="67d944aee6d15f9c" providerId="LiveId" clId="{33447587-8799-4C1C-9907-A87237C93132}" dt="2025-11-25T14:31:33.122" v="1383" actId="14100"/>
-          <ac:cxnSpMkLst>
-            <pc:docMk/>
-            <pc:sldMk cId="1129723175" sldId="256"/>
-            <ac:cxnSpMk id="560" creationId="{D0B9D3FE-B111-ABE6-0910-CEF48EFA3695}"/>
-          </ac:cxnSpMkLst>
-        </pc:cxnChg>
-        <pc:cxnChg chg="add">
-          <ac:chgData name="Mitchell Lee" userId="67d944aee6d15f9c" providerId="LiveId" clId="{33447587-8799-4C1C-9907-A87237C93132}" dt="2025-11-25T14:26:05.776" v="1317" actId="11529"/>
-          <ac:cxnSpMkLst>
-            <pc:docMk/>
-            <pc:sldMk cId="1129723175" sldId="256"/>
-            <ac:cxnSpMk id="562" creationId="{C99F2A9D-7743-8245-AFCC-E7A371C3F339}"/>
-          </ac:cxnSpMkLst>
-        </pc:cxnChg>
-        <pc:cxnChg chg="add mod">
-          <ac:chgData name="Mitchell Lee" userId="67d944aee6d15f9c" providerId="LiveId" clId="{33447587-8799-4C1C-9907-A87237C93132}" dt="2025-11-25T14:38:28.147" v="1415" actId="1076"/>
-          <ac:cxnSpMkLst>
-            <pc:docMk/>
-            <pc:sldMk cId="1129723175" sldId="256"/>
-            <ac:cxnSpMk id="608" creationId="{164888C2-18F5-41A2-9012-5D3F64038B68}"/>
-          </ac:cxnSpMkLst>
-        </pc:cxnChg>
-        <pc:cxnChg chg="add mod">
-          <ac:chgData name="Mitchell Lee" userId="67d944aee6d15f9c" providerId="LiveId" clId="{33447587-8799-4C1C-9907-A87237C93132}" dt="2025-11-25T14:38:28.147" v="1415" actId="1076"/>
-          <ac:cxnSpMkLst>
-            <pc:docMk/>
-            <pc:sldMk cId="1129723175" sldId="256"/>
-            <ac:cxnSpMk id="610" creationId="{C957D5B9-C66B-5475-4D7F-3B053342EE91}"/>
-          </ac:cxnSpMkLst>
-        </pc:cxnChg>
-        <pc:cxnChg chg="add mod">
-          <ac:chgData name="Mitchell Lee" userId="67d944aee6d15f9c" providerId="LiveId" clId="{33447587-8799-4C1C-9907-A87237C93132}" dt="2025-11-25T14:38:28.147" v="1415" actId="1076"/>
-          <ac:cxnSpMkLst>
-            <pc:docMk/>
-            <pc:sldMk cId="1129723175" sldId="256"/>
-            <ac:cxnSpMk id="612" creationId="{D582458B-F849-E442-0DF9-0265D5ECBD38}"/>
-          </ac:cxnSpMkLst>
-        </pc:cxnChg>
-        <pc:cxnChg chg="add mod">
-          <ac:chgData name="Mitchell Lee" userId="67d944aee6d15f9c" providerId="LiveId" clId="{33447587-8799-4C1C-9907-A87237C93132}" dt="2025-11-25T14:38:28.147" v="1415" actId="1076"/>
-          <ac:cxnSpMkLst>
-            <pc:docMk/>
-            <pc:sldMk cId="1129723175" sldId="256"/>
-            <ac:cxnSpMk id="614" creationId="{E6AF0C57-B3F6-7CA5-1075-ABBEC1E79E90}"/>
-          </ac:cxnSpMkLst>
-        </pc:cxnChg>
-        <pc:cxnChg chg="add mod">
-          <ac:chgData name="Mitchell Lee" userId="67d944aee6d15f9c" providerId="LiveId" clId="{33447587-8799-4C1C-9907-A87237C93132}" dt="2025-11-25T14:38:28.147" v="1415" actId="1076"/>
-          <ac:cxnSpMkLst>
-            <pc:docMk/>
-            <pc:sldMk cId="1129723175" sldId="256"/>
-            <ac:cxnSpMk id="616" creationId="{FFAAD883-48F5-6C44-5F7E-AB0334A459D6}"/>
-          </ac:cxnSpMkLst>
-        </pc:cxnChg>
-        <pc:cxnChg chg="add mod">
-          <ac:chgData name="Mitchell Lee" userId="67d944aee6d15f9c" providerId="LiveId" clId="{33447587-8799-4C1C-9907-A87237C93132}" dt="2025-11-25T14:38:28.147" v="1415" actId="1076"/>
-          <ac:cxnSpMkLst>
-            <pc:docMk/>
-            <pc:sldMk cId="1129723175" sldId="256"/>
-            <ac:cxnSpMk id="618" creationId="{C1AAF8F2-19E6-F9B6-20C0-42D1E6C4E26B}"/>
-          </ac:cxnSpMkLst>
-        </pc:cxnChg>
-        <pc:cxnChg chg="add mod">
-          <ac:chgData name="Mitchell Lee" userId="67d944aee6d15f9c" providerId="LiveId" clId="{33447587-8799-4C1C-9907-A87237C93132}" dt="2025-11-25T14:38:28.147" v="1415" actId="1076"/>
-          <ac:cxnSpMkLst>
-            <pc:docMk/>
-            <pc:sldMk cId="1129723175" sldId="256"/>
-            <ac:cxnSpMk id="620" creationId="{47415BA8-4E05-8D33-4B82-BD5CB5B996D7}"/>
-          </ac:cxnSpMkLst>
-        </pc:cxnChg>
-        <pc:cxnChg chg="add mod">
-          <ac:chgData name="Mitchell Lee" userId="67d944aee6d15f9c" providerId="LiveId" clId="{33447587-8799-4C1C-9907-A87237C93132}" dt="2025-11-25T14:38:28.147" v="1415" actId="1076"/>
-          <ac:cxnSpMkLst>
-            <pc:docMk/>
-            <pc:sldMk cId="1129723175" sldId="256"/>
-            <ac:cxnSpMk id="622" creationId="{8366F5C3-D496-3CB7-18CD-AC975D6A62D3}"/>
-          </ac:cxnSpMkLst>
-        </pc:cxnChg>
-      </pc:sldChg>
-    </pc:docChg>
-  </pc:docChgLst>
-</pc:chgInfo>
 </file>
 
 <file path=ppt/slideLayouts/slideLayout1.xml><?xml version="1.0" encoding="utf-8"?>
@@ -1325,7 +270,7 @@
           <a:p>
             <a:fld id="{756BEC26-F107-4EB2-9A30-D65761E9CBB2}" type="datetimeFigureOut">
               <a:rPr lang="en-SG" smtClean="0"/>
-              <a:t>25/11/2025</a:t>
+              <a:t>27/11/2025</a:t>
             </a:fld>
             <a:endParaRPr lang="en-SG"/>
           </a:p>
@@ -1525,7 +470,7 @@
           <a:p>
             <a:fld id="{756BEC26-F107-4EB2-9A30-D65761E9CBB2}" type="datetimeFigureOut">
               <a:rPr lang="en-SG" smtClean="0"/>
-              <a:t>25/11/2025</a:t>
+              <a:t>27/11/2025</a:t>
             </a:fld>
             <a:endParaRPr lang="en-SG"/>
           </a:p>
@@ -1735,7 +680,7 @@
           <a:p>
             <a:fld id="{756BEC26-F107-4EB2-9A30-D65761E9CBB2}" type="datetimeFigureOut">
               <a:rPr lang="en-SG" smtClean="0"/>
-              <a:t>25/11/2025</a:t>
+              <a:t>27/11/2025</a:t>
             </a:fld>
             <a:endParaRPr lang="en-SG"/>
           </a:p>
@@ -1935,7 +880,7 @@
           <a:p>
             <a:fld id="{756BEC26-F107-4EB2-9A30-D65761E9CBB2}" type="datetimeFigureOut">
               <a:rPr lang="en-SG" smtClean="0"/>
-              <a:t>25/11/2025</a:t>
+              <a:t>27/11/2025</a:t>
             </a:fld>
             <a:endParaRPr lang="en-SG"/>
           </a:p>
@@ -2211,7 +1156,7 @@
           <a:p>
             <a:fld id="{756BEC26-F107-4EB2-9A30-D65761E9CBB2}" type="datetimeFigureOut">
               <a:rPr lang="en-SG" smtClean="0"/>
-              <a:t>25/11/2025</a:t>
+              <a:t>27/11/2025</a:t>
             </a:fld>
             <a:endParaRPr lang="en-SG"/>
           </a:p>
@@ -2479,7 +1424,7 @@
           <a:p>
             <a:fld id="{756BEC26-F107-4EB2-9A30-D65761E9CBB2}" type="datetimeFigureOut">
               <a:rPr lang="en-SG" smtClean="0"/>
-              <a:t>25/11/2025</a:t>
+              <a:t>27/11/2025</a:t>
             </a:fld>
             <a:endParaRPr lang="en-SG"/>
           </a:p>
@@ -2894,7 +1839,7 @@
           <a:p>
             <a:fld id="{756BEC26-F107-4EB2-9A30-D65761E9CBB2}" type="datetimeFigureOut">
               <a:rPr lang="en-SG" smtClean="0"/>
-              <a:t>25/11/2025</a:t>
+              <a:t>27/11/2025</a:t>
             </a:fld>
             <a:endParaRPr lang="en-SG"/>
           </a:p>
@@ -3036,7 +1981,7 @@
           <a:p>
             <a:fld id="{756BEC26-F107-4EB2-9A30-D65761E9CBB2}" type="datetimeFigureOut">
               <a:rPr lang="en-SG" smtClean="0"/>
-              <a:t>25/11/2025</a:t>
+              <a:t>27/11/2025</a:t>
             </a:fld>
             <a:endParaRPr lang="en-SG"/>
           </a:p>
@@ -3149,7 +2094,7 @@
           <a:p>
             <a:fld id="{756BEC26-F107-4EB2-9A30-D65761E9CBB2}" type="datetimeFigureOut">
               <a:rPr lang="en-SG" smtClean="0"/>
-              <a:t>25/11/2025</a:t>
+              <a:t>27/11/2025</a:t>
             </a:fld>
             <a:endParaRPr lang="en-SG"/>
           </a:p>
@@ -3462,7 +2407,7 @@
           <a:p>
             <a:fld id="{756BEC26-F107-4EB2-9A30-D65761E9CBB2}" type="datetimeFigureOut">
               <a:rPr lang="en-SG" smtClean="0"/>
-              <a:t>25/11/2025</a:t>
+              <a:t>27/11/2025</a:t>
             </a:fld>
             <a:endParaRPr lang="en-SG"/>
           </a:p>
@@ -3751,7 +2696,7 @@
           <a:p>
             <a:fld id="{756BEC26-F107-4EB2-9A30-D65761E9CBB2}" type="datetimeFigureOut">
               <a:rPr lang="en-SG" smtClean="0"/>
-              <a:t>25/11/2025</a:t>
+              <a:t>27/11/2025</a:t>
             </a:fld>
             <a:endParaRPr lang="en-SG"/>
           </a:p>
@@ -3994,7 +2939,7 @@
           <a:p>
             <a:fld id="{756BEC26-F107-4EB2-9A30-D65761E9CBB2}" type="datetimeFigureOut">
               <a:rPr lang="en-SG" smtClean="0"/>
-              <a:t>25/11/2025</a:t>
+              <a:t>27/11/2025</a:t>
             </a:fld>
             <a:endParaRPr lang="en-SG"/>
           </a:p>
@@ -8350,6 +7295,549 @@
     <p:extLst>
       <p:ext uri="{BB962C8B-B14F-4D97-AF65-F5344CB8AC3E}">
         <p14:creationId xmlns:p14="http://schemas.microsoft.com/office/powerpoint/2010/main" val="1129723175"/>
+      </p:ext>
+    </p:extLst>
+  </p:cSld>
+  <p:clrMapOvr>
+    <a:masterClrMapping/>
+  </p:clrMapOvr>
+</p:sld>
+</file>
+
+<file path=ppt/slides/slide2.xml><?xml version="1.0" encoding="utf-8"?>
+<p:sld xmlns:a="http://schemas.openxmlformats.org/drawingml/2006/main" xmlns:r="http://schemas.openxmlformats.org/officeDocument/2006/relationships" xmlns:p="http://schemas.openxmlformats.org/presentationml/2006/main">
+  <p:cSld>
+    <p:spTree>
+      <p:nvGrpSpPr>
+        <p:cNvPr id="1" name=""/>
+        <p:cNvGrpSpPr/>
+        <p:nvPr/>
+      </p:nvGrpSpPr>
+      <p:grpSpPr>
+        <a:xfrm>
+          <a:off x="0" y="0"/>
+          <a:ext cx="0" cy="0"/>
+          <a:chOff x="0" y="0"/>
+          <a:chExt cx="0" cy="0"/>
+        </a:xfrm>
+      </p:grpSpPr>
+      <p:sp>
+        <p:nvSpPr>
+          <p:cNvPr id="4" name="Rectangle 3">
+            <a:extLst>
+              <a:ext uri="{FF2B5EF4-FFF2-40B4-BE49-F238E27FC236}">
+                <a16:creationId xmlns:a16="http://schemas.microsoft.com/office/drawing/2014/main" id="{0E974C64-0002-416C-E783-B07C00D57EB2}"/>
+              </a:ext>
+            </a:extLst>
+          </p:cNvPr>
+          <p:cNvSpPr/>
+          <p:nvPr/>
+        </p:nvSpPr>
+        <p:spPr>
+          <a:xfrm>
+            <a:off x="1254358" y="902903"/>
+            <a:ext cx="2019300" cy="419100"/>
+          </a:xfrm>
+          <a:prstGeom prst="rect">
+            <a:avLst/>
+          </a:prstGeom>
+        </p:spPr>
+        <p:style>
+          <a:lnRef idx="2">
+            <a:schemeClr val="accent1">
+              <a:shade val="15000"/>
+            </a:schemeClr>
+          </a:lnRef>
+          <a:fillRef idx="1">
+            <a:schemeClr val="accent1"/>
+          </a:fillRef>
+          <a:effectRef idx="0">
+            <a:schemeClr val="accent1"/>
+          </a:effectRef>
+          <a:fontRef idx="minor">
+            <a:schemeClr val="lt1"/>
+          </a:fontRef>
+        </p:style>
+        <p:txBody>
+          <a:bodyPr rtlCol="0" anchor="ctr"/>
+          <a:lstStyle/>
+          <a:p>
+            <a:pPr algn="ctr"/>
+            <a:r>
+              <a:rPr lang="en-GB" dirty="0"/>
+              <a:t>Country</a:t>
+            </a:r>
+            <a:endParaRPr lang="en-SG" dirty="0"/>
+          </a:p>
+        </p:txBody>
+      </p:sp>
+      <p:sp>
+        <p:nvSpPr>
+          <p:cNvPr id="5" name="Rectangle 4">
+            <a:extLst>
+              <a:ext uri="{FF2B5EF4-FFF2-40B4-BE49-F238E27FC236}">
+                <a16:creationId xmlns:a16="http://schemas.microsoft.com/office/drawing/2014/main" id="{23BD9C12-8F8E-250A-94FA-F7A6A56B0FBF}"/>
+              </a:ext>
+            </a:extLst>
+          </p:cNvPr>
+          <p:cNvSpPr/>
+          <p:nvPr/>
+        </p:nvSpPr>
+        <p:spPr>
+          <a:xfrm>
+            <a:off x="2916922" y="3632997"/>
+            <a:ext cx="2019300" cy="419100"/>
+          </a:xfrm>
+          <a:prstGeom prst="rect">
+            <a:avLst/>
+          </a:prstGeom>
+        </p:spPr>
+        <p:style>
+          <a:lnRef idx="2">
+            <a:schemeClr val="accent1">
+              <a:shade val="15000"/>
+            </a:schemeClr>
+          </a:lnRef>
+          <a:fillRef idx="1">
+            <a:schemeClr val="accent1"/>
+          </a:fillRef>
+          <a:effectRef idx="0">
+            <a:schemeClr val="accent1"/>
+          </a:effectRef>
+          <a:fontRef idx="minor">
+            <a:schemeClr val="lt1"/>
+          </a:fontRef>
+        </p:style>
+        <p:txBody>
+          <a:bodyPr rtlCol="0" anchor="ctr"/>
+          <a:lstStyle/>
+          <a:p>
+            <a:pPr algn="ctr"/>
+            <a:r>
+              <a:rPr lang="en-GB" dirty="0"/>
+              <a:t>Capital [array]</a:t>
+            </a:r>
+            <a:endParaRPr lang="en-SG" dirty="0"/>
+          </a:p>
+        </p:txBody>
+      </p:sp>
+      <p:sp>
+        <p:nvSpPr>
+          <p:cNvPr id="6" name="Rectangle 5">
+            <a:extLst>
+              <a:ext uri="{FF2B5EF4-FFF2-40B4-BE49-F238E27FC236}">
+                <a16:creationId xmlns:a16="http://schemas.microsoft.com/office/drawing/2014/main" id="{4196929E-5119-04E0-D708-628ECE1944F8}"/>
+              </a:ext>
+            </a:extLst>
+          </p:cNvPr>
+          <p:cNvSpPr/>
+          <p:nvPr/>
+        </p:nvSpPr>
+        <p:spPr>
+          <a:xfrm>
+            <a:off x="2916922" y="4584497"/>
+            <a:ext cx="2019300" cy="419100"/>
+          </a:xfrm>
+          <a:prstGeom prst="rect">
+            <a:avLst/>
+          </a:prstGeom>
+        </p:spPr>
+        <p:style>
+          <a:lnRef idx="2">
+            <a:schemeClr val="accent1">
+              <a:shade val="15000"/>
+            </a:schemeClr>
+          </a:lnRef>
+          <a:fillRef idx="1">
+            <a:schemeClr val="accent1"/>
+          </a:fillRef>
+          <a:effectRef idx="0">
+            <a:schemeClr val="accent1"/>
+          </a:effectRef>
+          <a:fontRef idx="minor">
+            <a:schemeClr val="lt1"/>
+          </a:fontRef>
+        </p:style>
+        <p:txBody>
+          <a:bodyPr rtlCol="0" anchor="ctr"/>
+          <a:lstStyle/>
+          <a:p>
+            <a:pPr algn="ctr"/>
+            <a:r>
+              <a:rPr lang="en-GB" dirty="0" err="1"/>
+              <a:t>Latlng</a:t>
+            </a:r>
+            <a:r>
+              <a:rPr lang="en-GB" dirty="0"/>
+              <a:t> [array]</a:t>
+            </a:r>
+            <a:endParaRPr lang="en-SG" dirty="0"/>
+          </a:p>
+        </p:txBody>
+      </p:sp>
+      <p:sp>
+        <p:nvSpPr>
+          <p:cNvPr id="7" name="Rectangle 6">
+            <a:extLst>
+              <a:ext uri="{FF2B5EF4-FFF2-40B4-BE49-F238E27FC236}">
+                <a16:creationId xmlns:a16="http://schemas.microsoft.com/office/drawing/2014/main" id="{D048C4F1-814C-060E-91D8-F3373CD3AE46}"/>
+              </a:ext>
+            </a:extLst>
+          </p:cNvPr>
+          <p:cNvSpPr/>
+          <p:nvPr/>
+        </p:nvSpPr>
+        <p:spPr>
+          <a:xfrm>
+            <a:off x="2916922" y="5535997"/>
+            <a:ext cx="2019300" cy="419100"/>
+          </a:xfrm>
+          <a:prstGeom prst="rect">
+            <a:avLst/>
+          </a:prstGeom>
+        </p:spPr>
+        <p:style>
+          <a:lnRef idx="2">
+            <a:schemeClr val="accent1">
+              <a:shade val="15000"/>
+            </a:schemeClr>
+          </a:lnRef>
+          <a:fillRef idx="1">
+            <a:schemeClr val="accent1"/>
+          </a:fillRef>
+          <a:effectRef idx="0">
+            <a:schemeClr val="accent1"/>
+          </a:effectRef>
+          <a:fontRef idx="minor">
+            <a:schemeClr val="lt1"/>
+          </a:fontRef>
+        </p:style>
+        <p:txBody>
+          <a:bodyPr rtlCol="0" anchor="ctr"/>
+          <a:lstStyle/>
+          <a:p>
+            <a:pPr algn="ctr"/>
+            <a:r>
+              <a:rPr lang="en-GB" dirty="0"/>
+              <a:t>flag</a:t>
+            </a:r>
+            <a:endParaRPr lang="en-SG" dirty="0"/>
+          </a:p>
+        </p:txBody>
+      </p:sp>
+      <p:sp>
+        <p:nvSpPr>
+          <p:cNvPr id="9" name="Rectangle 8">
+            <a:extLst>
+              <a:ext uri="{FF2B5EF4-FFF2-40B4-BE49-F238E27FC236}">
+                <a16:creationId xmlns:a16="http://schemas.microsoft.com/office/drawing/2014/main" id="{C7E94584-AC46-9253-69C5-DA1DADAA46F4}"/>
+              </a:ext>
+            </a:extLst>
+          </p:cNvPr>
+          <p:cNvSpPr/>
+          <p:nvPr/>
+        </p:nvSpPr>
+        <p:spPr>
+          <a:xfrm>
+            <a:off x="5676216" y="2941057"/>
+            <a:ext cx="2019300" cy="401678"/>
+          </a:xfrm>
+          <a:prstGeom prst="rect">
+            <a:avLst/>
+          </a:prstGeom>
+        </p:spPr>
+        <p:style>
+          <a:lnRef idx="2">
+            <a:schemeClr val="accent1">
+              <a:shade val="15000"/>
+            </a:schemeClr>
+          </a:lnRef>
+          <a:fillRef idx="1">
+            <a:schemeClr val="accent1"/>
+          </a:fillRef>
+          <a:effectRef idx="0">
+            <a:schemeClr val="accent1"/>
+          </a:effectRef>
+          <a:fontRef idx="minor">
+            <a:schemeClr val="lt1"/>
+          </a:fontRef>
+        </p:style>
+        <p:txBody>
+          <a:bodyPr rtlCol="0" anchor="ctr"/>
+          <a:lstStyle/>
+          <a:p>
+            <a:pPr algn="ctr"/>
+            <a:r>
+              <a:rPr lang="en-GB" dirty="0"/>
+              <a:t>common</a:t>
+            </a:r>
+            <a:endParaRPr lang="en-SG" dirty="0"/>
+          </a:p>
+        </p:txBody>
+      </p:sp>
+      <p:sp>
+        <p:nvSpPr>
+          <p:cNvPr id="10" name="Rectangle 9">
+            <a:extLst>
+              <a:ext uri="{FF2B5EF4-FFF2-40B4-BE49-F238E27FC236}">
+                <a16:creationId xmlns:a16="http://schemas.microsoft.com/office/drawing/2014/main" id="{FC2E63B1-185F-B734-2B94-1CFE2B569716}"/>
+              </a:ext>
+            </a:extLst>
+          </p:cNvPr>
+          <p:cNvSpPr/>
+          <p:nvPr/>
+        </p:nvSpPr>
+        <p:spPr>
+          <a:xfrm>
+            <a:off x="2916922" y="2267950"/>
+            <a:ext cx="2019300" cy="419100"/>
+          </a:xfrm>
+          <a:prstGeom prst="rect">
+            <a:avLst/>
+          </a:prstGeom>
+        </p:spPr>
+        <p:style>
+          <a:lnRef idx="2">
+            <a:schemeClr val="accent1">
+              <a:shade val="15000"/>
+            </a:schemeClr>
+          </a:lnRef>
+          <a:fillRef idx="1">
+            <a:schemeClr val="accent1"/>
+          </a:fillRef>
+          <a:effectRef idx="0">
+            <a:schemeClr val="accent1"/>
+          </a:effectRef>
+          <a:fontRef idx="minor">
+            <a:schemeClr val="lt1"/>
+          </a:fontRef>
+        </p:style>
+        <p:txBody>
+          <a:bodyPr rtlCol="0" anchor="ctr"/>
+          <a:lstStyle/>
+          <a:p>
+            <a:pPr algn="ctr"/>
+            <a:r>
+              <a:rPr lang="en-GB" dirty="0"/>
+              <a:t>name</a:t>
+            </a:r>
+          </a:p>
+        </p:txBody>
+      </p:sp>
+      <p:cxnSp>
+        <p:nvCxnSpPr>
+          <p:cNvPr id="12" name="Connector: Elbow 11">
+            <a:extLst>
+              <a:ext uri="{FF2B5EF4-FFF2-40B4-BE49-F238E27FC236}">
+                <a16:creationId xmlns:a16="http://schemas.microsoft.com/office/drawing/2014/main" id="{DC9320F6-4129-0989-2FAA-579D6E2D8963}"/>
+              </a:ext>
+            </a:extLst>
+          </p:cNvPr>
+          <p:cNvCxnSpPr>
+            <a:stCxn id="4" idx="2"/>
+            <a:endCxn id="10" idx="1"/>
+          </p:cNvCxnSpPr>
+          <p:nvPr/>
+        </p:nvCxnSpPr>
+        <p:spPr>
+          <a:xfrm rot="16200000" flipH="1">
+            <a:off x="2012717" y="1573294"/>
+            <a:ext cx="1155497" cy="652914"/>
+          </a:xfrm>
+          <a:prstGeom prst="bentConnector2">
+            <a:avLst/>
+          </a:prstGeom>
+          <a:ln>
+            <a:tailEnd type="triangle"/>
+          </a:ln>
+        </p:spPr>
+        <p:style>
+          <a:lnRef idx="2">
+            <a:schemeClr val="accent1"/>
+          </a:lnRef>
+          <a:fillRef idx="0">
+            <a:schemeClr val="accent1"/>
+          </a:fillRef>
+          <a:effectRef idx="1">
+            <a:schemeClr val="accent1"/>
+          </a:effectRef>
+          <a:fontRef idx="minor">
+            <a:schemeClr val="tx1"/>
+          </a:fontRef>
+        </p:style>
+      </p:cxnSp>
+      <p:cxnSp>
+        <p:nvCxnSpPr>
+          <p:cNvPr id="14" name="Connector: Elbow 13">
+            <a:extLst>
+              <a:ext uri="{FF2B5EF4-FFF2-40B4-BE49-F238E27FC236}">
+                <a16:creationId xmlns:a16="http://schemas.microsoft.com/office/drawing/2014/main" id="{8B658E9B-7DA4-C7BA-7C5F-9EAECEE10773}"/>
+              </a:ext>
+            </a:extLst>
+          </p:cNvPr>
+          <p:cNvCxnSpPr>
+            <a:stCxn id="4" idx="2"/>
+            <a:endCxn id="5" idx="1"/>
+          </p:cNvCxnSpPr>
+          <p:nvPr/>
+        </p:nvCxnSpPr>
+        <p:spPr>
+          <a:xfrm rot="16200000" flipH="1">
+            <a:off x="1330193" y="2255818"/>
+            <a:ext cx="2520544" cy="652914"/>
+          </a:xfrm>
+          <a:prstGeom prst="bentConnector2">
+            <a:avLst/>
+          </a:prstGeom>
+          <a:ln>
+            <a:tailEnd type="triangle"/>
+          </a:ln>
+        </p:spPr>
+        <p:style>
+          <a:lnRef idx="2">
+            <a:schemeClr val="accent1"/>
+          </a:lnRef>
+          <a:fillRef idx="0">
+            <a:schemeClr val="accent1"/>
+          </a:fillRef>
+          <a:effectRef idx="1">
+            <a:schemeClr val="accent1"/>
+          </a:effectRef>
+          <a:fontRef idx="minor">
+            <a:schemeClr val="tx1"/>
+          </a:fontRef>
+        </p:style>
+      </p:cxnSp>
+      <p:cxnSp>
+        <p:nvCxnSpPr>
+          <p:cNvPr id="16" name="Connector: Elbow 15">
+            <a:extLst>
+              <a:ext uri="{FF2B5EF4-FFF2-40B4-BE49-F238E27FC236}">
+                <a16:creationId xmlns:a16="http://schemas.microsoft.com/office/drawing/2014/main" id="{1045DCCD-A4D9-6C11-5E57-FAD647144D56}"/>
+              </a:ext>
+            </a:extLst>
+          </p:cNvPr>
+          <p:cNvCxnSpPr>
+            <a:stCxn id="4" idx="2"/>
+            <a:endCxn id="6" idx="1"/>
+          </p:cNvCxnSpPr>
+          <p:nvPr/>
+        </p:nvCxnSpPr>
+        <p:spPr>
+          <a:xfrm rot="16200000" flipH="1">
+            <a:off x="854443" y="2731568"/>
+            <a:ext cx="3472044" cy="652914"/>
+          </a:xfrm>
+          <a:prstGeom prst="bentConnector2">
+            <a:avLst/>
+          </a:prstGeom>
+          <a:ln>
+            <a:tailEnd type="triangle"/>
+          </a:ln>
+        </p:spPr>
+        <p:style>
+          <a:lnRef idx="2">
+            <a:schemeClr val="accent1"/>
+          </a:lnRef>
+          <a:fillRef idx="0">
+            <a:schemeClr val="accent1"/>
+          </a:fillRef>
+          <a:effectRef idx="1">
+            <a:schemeClr val="accent1"/>
+          </a:effectRef>
+          <a:fontRef idx="minor">
+            <a:schemeClr val="tx1"/>
+          </a:fontRef>
+        </p:style>
+      </p:cxnSp>
+      <p:cxnSp>
+        <p:nvCxnSpPr>
+          <p:cNvPr id="18" name="Connector: Elbow 17">
+            <a:extLst>
+              <a:ext uri="{FF2B5EF4-FFF2-40B4-BE49-F238E27FC236}">
+                <a16:creationId xmlns:a16="http://schemas.microsoft.com/office/drawing/2014/main" id="{47C2F8F7-BC78-1110-C1B6-72DCF17F628D}"/>
+              </a:ext>
+            </a:extLst>
+          </p:cNvPr>
+          <p:cNvCxnSpPr>
+            <a:stCxn id="4" idx="2"/>
+            <a:endCxn id="7" idx="1"/>
+          </p:cNvCxnSpPr>
+          <p:nvPr/>
+        </p:nvCxnSpPr>
+        <p:spPr>
+          <a:xfrm rot="16200000" flipH="1">
+            <a:off x="378693" y="3207318"/>
+            <a:ext cx="4423544" cy="652914"/>
+          </a:xfrm>
+          <a:prstGeom prst="bentConnector2">
+            <a:avLst/>
+          </a:prstGeom>
+          <a:ln>
+            <a:tailEnd type="triangle"/>
+          </a:ln>
+        </p:spPr>
+        <p:style>
+          <a:lnRef idx="2">
+            <a:schemeClr val="accent1"/>
+          </a:lnRef>
+          <a:fillRef idx="0">
+            <a:schemeClr val="accent1"/>
+          </a:fillRef>
+          <a:effectRef idx="1">
+            <a:schemeClr val="accent1"/>
+          </a:effectRef>
+          <a:fontRef idx="minor">
+            <a:schemeClr val="tx1"/>
+          </a:fontRef>
+        </p:style>
+      </p:cxnSp>
+      <p:cxnSp>
+        <p:nvCxnSpPr>
+          <p:cNvPr id="20" name="Connector: Elbow 19">
+            <a:extLst>
+              <a:ext uri="{FF2B5EF4-FFF2-40B4-BE49-F238E27FC236}">
+                <a16:creationId xmlns:a16="http://schemas.microsoft.com/office/drawing/2014/main" id="{31EDF081-117F-CC23-72A8-2098CE899C45}"/>
+              </a:ext>
+            </a:extLst>
+          </p:cNvPr>
+          <p:cNvCxnSpPr>
+            <a:stCxn id="10" idx="2"/>
+            <a:endCxn id="9" idx="1"/>
+          </p:cNvCxnSpPr>
+          <p:nvPr/>
+        </p:nvCxnSpPr>
+        <p:spPr>
+          <a:xfrm rot="16200000" flipH="1">
+            <a:off x="4573971" y="2039651"/>
+            <a:ext cx="454846" cy="1749644"/>
+          </a:xfrm>
+          <a:prstGeom prst="bentConnector2">
+            <a:avLst/>
+          </a:prstGeom>
+          <a:ln>
+            <a:tailEnd type="triangle"/>
+          </a:ln>
+        </p:spPr>
+        <p:style>
+          <a:lnRef idx="2">
+            <a:schemeClr val="accent1"/>
+          </a:lnRef>
+          <a:fillRef idx="0">
+            <a:schemeClr val="accent1"/>
+          </a:fillRef>
+          <a:effectRef idx="1">
+            <a:schemeClr val="accent1"/>
+          </a:effectRef>
+          <a:fontRef idx="minor">
+            <a:schemeClr val="tx1"/>
+          </a:fontRef>
+        </p:style>
+      </p:cxnSp>
+    </p:spTree>
+    <p:extLst>
+      <p:ext uri="{BB962C8B-B14F-4D97-AF65-F5344CB8AC3E}">
+        <p14:creationId xmlns:p14="http://schemas.microsoft.com/office/powerpoint/2010/main" val="2693577481"/>
       </p:ext>
     </p:extLst>
   </p:cSld>
